--- a/deliverables/business/mimoo-pitch.pptx
+++ b/deliverables/business/mimoo-pitch.pptx
@@ -11,9 +11,11 @@
     <p:sldId id="259" r:id="rId5"/>
     <p:sldId id="260" r:id="rId6"/>
     <p:sldId id="261" r:id="rId7"/>
+    <p:sldId id="262" r:id="rId8"/>
+    <p:sldId id="263" r:id="rId9"/>
   </p:sldIdLst>
   <p:notesMasterIdLst>
-    <p:notesMasterId r:id="rId8"/>
+    <p:notesMasterId r:id="rId10"/>
   </p:notesMasterIdLst>
   <p:sldSz cx="9144000" cy="5143500"/>
   <p:notesSz cx="5143500" cy="9144000"/>
@@ -971,6 +973,182 @@
             <a:fld id="{F7021451-1387-4CA6-816F-3879F97B5CBC}" type="slidenum">
               <a:rPr lang="en-US"/>
               <a:t>6</a:t>
+            </a:fld>
+            <a:endParaRPr lang="en-US"/>
+          </a:p>
+        </p:txBody>
+      </p:sp>
+    </p:spTree>
+    <p:extLst>
+      <p:ext uri="{BB962C8B-B14F-4D97-AF65-F5344CB8AC3E}">
+        <p14:creationId xmlns:p14="http://schemas.microsoft.com/office/powerpoint/2010/main" val="1024086991"/>
+      </p:ext>
+    </p:extLst>
+  </p:cSld>
+  <p:clrMapOvr>
+    <a:masterClrMapping/>
+  </p:clrMapOvr>
+</p:notes>
+</file>
+
+<file path=ppt/notesSlides/notesSlide7.xml><?xml version="1.0" encoding="utf-8"?>
+<p:notes xmlns:a="http://schemas.openxmlformats.org/drawingml/2006/main" xmlns:r="http://schemas.openxmlformats.org/officeDocument/2006/relationships" xmlns:p="http://schemas.openxmlformats.org/presentationml/2006/main">
+  <p:cSld>
+    <p:spTree>
+      <p:nvGrpSpPr>
+        <p:cNvPr id="1" name=""/>
+        <p:cNvGrpSpPr/>
+        <p:nvPr/>
+      </p:nvGrpSpPr>
+      <p:grpSpPr>
+        <a:xfrm>
+          <a:off x="0" y="0"/>
+          <a:ext cx="0" cy="0"/>
+          <a:chOff x="0" y="0"/>
+          <a:chExt cx="0" cy="0"/>
+        </a:xfrm>
+      </p:grpSpPr>
+      <p:sp>
+        <p:nvSpPr>
+          <p:cNvPr id="2" name="Slide Image Placeholder 1"/>
+          <p:cNvSpPr>
+            <a:spLocks noGrp="1" noRot="1" noChangeAspect="1"/>
+          </p:cNvSpPr>
+          <p:nvPr>
+            <p:ph type="sldImg"/>
+          </p:nvPr>
+        </p:nvSpPr>
+        <p:spPr/>
+      </p:sp>
+      <p:sp>
+        <p:nvSpPr>
+          <p:cNvPr id="3" name="Notes Placeholder 2"/>
+          <p:cNvSpPr>
+            <a:spLocks noGrp="1"/>
+          </p:cNvSpPr>
+          <p:nvPr>
+            <p:ph type="body" idx="1"/>
+          </p:nvPr>
+        </p:nvSpPr>
+        <p:spPr/>
+        <p:txBody>
+          <a:bodyPr/>
+          <a:lstStyle/>
+          <a:p>
+            <a:r>
+              <a:rPr lang="en-US" dirty="0"/>
+              <a:t/>
+            </a:r>
+            <a:endParaRPr lang="en-US" dirty="0"/>
+          </a:p>
+        </p:txBody>
+      </p:sp>
+      <p:sp>
+        <p:nvSpPr>
+          <p:cNvPr id="4" name="Slide Number Placeholder 3"/>
+          <p:cNvSpPr>
+            <a:spLocks noGrp="1"/>
+          </p:cNvSpPr>
+          <p:nvPr>
+            <p:ph type="sldNum" sz="quarter" idx="10"/>
+          </p:nvPr>
+        </p:nvSpPr>
+        <p:spPr/>
+        <p:txBody>
+          <a:bodyPr/>
+          <a:lstStyle/>
+          <a:p>
+            <a:fld id="{F7021451-1387-4CA6-816F-3879F97B5CBC}" type="slidenum">
+              <a:rPr lang="en-US"/>
+              <a:t>7</a:t>
+            </a:fld>
+            <a:endParaRPr lang="en-US"/>
+          </a:p>
+        </p:txBody>
+      </p:sp>
+    </p:spTree>
+    <p:extLst>
+      <p:ext uri="{BB962C8B-B14F-4D97-AF65-F5344CB8AC3E}">
+        <p14:creationId xmlns:p14="http://schemas.microsoft.com/office/powerpoint/2010/main" val="1024086991"/>
+      </p:ext>
+    </p:extLst>
+  </p:cSld>
+  <p:clrMapOvr>
+    <a:masterClrMapping/>
+  </p:clrMapOvr>
+</p:notes>
+</file>
+
+<file path=ppt/notesSlides/notesSlide8.xml><?xml version="1.0" encoding="utf-8"?>
+<p:notes xmlns:a="http://schemas.openxmlformats.org/drawingml/2006/main" xmlns:r="http://schemas.openxmlformats.org/officeDocument/2006/relationships" xmlns:p="http://schemas.openxmlformats.org/presentationml/2006/main">
+  <p:cSld>
+    <p:spTree>
+      <p:nvGrpSpPr>
+        <p:cNvPr id="1" name=""/>
+        <p:cNvGrpSpPr/>
+        <p:nvPr/>
+      </p:nvGrpSpPr>
+      <p:grpSpPr>
+        <a:xfrm>
+          <a:off x="0" y="0"/>
+          <a:ext cx="0" cy="0"/>
+          <a:chOff x="0" y="0"/>
+          <a:chExt cx="0" cy="0"/>
+        </a:xfrm>
+      </p:grpSpPr>
+      <p:sp>
+        <p:nvSpPr>
+          <p:cNvPr id="2" name="Slide Image Placeholder 1"/>
+          <p:cNvSpPr>
+            <a:spLocks noGrp="1" noRot="1" noChangeAspect="1"/>
+          </p:cNvSpPr>
+          <p:nvPr>
+            <p:ph type="sldImg"/>
+          </p:nvPr>
+        </p:nvSpPr>
+        <p:spPr/>
+      </p:sp>
+      <p:sp>
+        <p:nvSpPr>
+          <p:cNvPr id="3" name="Notes Placeholder 2"/>
+          <p:cNvSpPr>
+            <a:spLocks noGrp="1"/>
+          </p:cNvSpPr>
+          <p:nvPr>
+            <p:ph type="body" idx="1"/>
+          </p:nvPr>
+        </p:nvSpPr>
+        <p:spPr/>
+        <p:txBody>
+          <a:bodyPr/>
+          <a:lstStyle/>
+          <a:p>
+            <a:r>
+              <a:rPr lang="en-US" dirty="0"/>
+              <a:t/>
+            </a:r>
+            <a:endParaRPr lang="en-US" dirty="0"/>
+          </a:p>
+        </p:txBody>
+      </p:sp>
+      <p:sp>
+        <p:nvSpPr>
+          <p:cNvPr id="4" name="Slide Number Placeholder 3"/>
+          <p:cNvSpPr>
+            <a:spLocks noGrp="1"/>
+          </p:cNvSpPr>
+          <p:nvPr>
+            <p:ph type="sldNum" sz="quarter" idx="10"/>
+          </p:nvPr>
+        </p:nvSpPr>
+        <p:spPr/>
+        <p:txBody>
+          <a:bodyPr/>
+          <a:lstStyle/>
+          <a:p>
+            <a:fld id="{F7021451-1387-4CA6-816F-3879F97B5CBC}" type="slidenum">
+              <a:rPr lang="en-US"/>
+              <a:t>8</a:t>
             </a:fld>
             <a:endParaRPr lang="en-US"/>
           </a:p>
@@ -1387,7 +1565,7 @@
         </p:nvSpPr>
         <p:spPr>
           <a:xfrm>
-            <a:off x="640080" y="1097280"/>
+            <a:off x="640080" y="1078992"/>
             <a:ext cx="7863840" cy="1280160"/>
           </a:xfrm>
           <a:prstGeom prst="rect">
@@ -1449,7 +1627,7 @@
         </p:nvSpPr>
         <p:spPr>
           <a:xfrm>
-            <a:off x="640080" y="2697480"/>
+            <a:off x="640080" y="2670048"/>
             <a:ext cx="7772400" cy="685800"/>
           </a:xfrm>
           <a:prstGeom prst="rect">
@@ -1491,7 +1669,7 @@
         </p:nvSpPr>
         <p:spPr>
           <a:xfrm>
-            <a:off x="640080" y="3456432"/>
+            <a:off x="640080" y="3419856"/>
             <a:ext cx="7772400" cy="640080"/>
           </a:xfrm>
           <a:prstGeom prst="rect">
@@ -1519,7 +1697,7 @@
                 <a:ea typeface="Calibri" pitchFamily="34" charset="-122"/>
                 <a:cs typeface="Calibri" pitchFamily="34" charset="-120"/>
               </a:rPr>
-              <a:t>There are thousands like him — doctors, engineers, civil servants, the diaspora. People with the money and the love for cattle, locked out by one thing: they can't be in the room.</a:t>
+              <a:t>There are thousands like him — doctors, engineers, civil servants, the diaspora. People with the money and the love for cattle, kept out by one thing: they can't be in the room.</a:t>
             </a:r>
             <a:endParaRPr lang="en-US" sz="1300" dirty="0"/>
           </a:p>
@@ -1533,7 +1711,7 @@
         </p:nvSpPr>
         <p:spPr>
           <a:xfrm>
-            <a:off x="640080" y="4315968"/>
+            <a:off x="640080" y="4297680"/>
             <a:ext cx="7863840" cy="365760"/>
           </a:xfrm>
           <a:prstGeom prst="rect">
@@ -1550,7 +1728,7 @@
               <a:buNone/>
             </a:pPr>
             <a:r>
-              <a:rPr lang="en-US" sz="1500" b="1" i="1" dirty="0">
+              <a:rPr lang="en-US" sz="1600" b="1" i="1" dirty="0">
                 <a:solidFill>
                   <a:srgbClr val="D4A843"/>
                 </a:solidFill>
@@ -1558,9 +1736,9 @@
                 <a:ea typeface="Georgia" pitchFamily="34" charset="-122"/>
                 <a:cs typeface="Georgia" pitchFamily="34" charset="-120"/>
               </a:rPr>
-              <a:t>That missing buyer is the demand leaking off your floor.</a:t>
-            </a:r>
-            <a:endParaRPr lang="en-US" sz="1500" dirty="0"/>
+              <a:t>He isn't the exception. He's where your buyers are going.</a:t>
+            </a:r>
+            <a:endParaRPr lang="en-US" sz="1600" dirty="0"/>
           </a:p>
         </p:txBody>
       </p:sp>
@@ -1578,7 +1756,7 @@
     <p:bg>
       <p:bgPr>
         <a:solidFill>
-          <a:srgbClr val="F5E6D3"/>
+          <a:srgbClr val="2D1B1A"/>
         </a:solidFill>
       </p:bgPr>
     </p:bg>
@@ -1624,7 +1802,7 @@
         </p:nvSpPr>
         <p:spPr>
           <a:xfrm>
-            <a:off x="640080" y="457200"/>
+            <a:off x="640080" y="475488"/>
             <a:ext cx="7772400" cy="274320"/>
           </a:xfrm>
           <a:prstGeom prst="rect">
@@ -1643,13 +1821,13 @@
             <a:r>
               <a:rPr lang="en-US" sz="1100" b="1" spc="400" kern="0" dirty="0">
                 <a:solidFill>
-                  <a:srgbClr val="B85042"/>
+                  <a:srgbClr val="D4A843"/>
                 </a:solidFill>
                 <a:latin typeface="Calibri" pitchFamily="34" charset="0"/>
                 <a:ea typeface="Calibri" pitchFamily="34" charset="-122"/>
                 <a:cs typeface="Calibri" pitchFamily="34" charset="-120"/>
               </a:rPr>
-              <a:t>THE PROBLEM</a:t>
+              <a:t>WHAT'S CHANGING</a:t>
             </a:r>
             <a:endParaRPr lang="en-US" sz="1100" dirty="0"/>
           </a:p>
@@ -1663,8 +1841,8 @@
         </p:nvSpPr>
         <p:spPr>
           <a:xfrm>
-            <a:off x="640080" y="868680"/>
-            <a:ext cx="7955280" cy="777240"/>
+            <a:off x="640080" y="960120"/>
+            <a:ext cx="7955280" cy="1188720"/>
           </a:xfrm>
           <a:prstGeom prst="rect">
             <a:avLst/>
@@ -1678,22 +1856,42 @@
           <a:p>
             <a:pPr indent="0" marL="0">
               <a:lnSpc>
-                <a:spcPct val="100000"/>
+                <a:spcPct val="102000"/>
               </a:lnSpc>
               <a:buNone/>
             </a:pPr>
             <a:r>
-              <a:rPr lang="en-US" sz="2600" b="1" dirty="0">
-                <a:solidFill>
-                  <a:srgbClr val="2D1B1A"/>
+              <a:rPr lang="en-US" sz="2900" b="1" dirty="0">
+                <a:solidFill>
+                  <a:srgbClr val="F5E6D3"/>
                 </a:solidFill>
                 <a:latin typeface="Georgia" pitchFamily="34" charset="0"/>
                 <a:ea typeface="Georgia" pitchFamily="34" charset="-122"/>
                 <a:cs typeface="Georgia" pitchFamily="34" charset="-120"/>
               </a:rPr>
-              <a:t>Your room is only as strong as who's in it.</a:t>
-            </a:r>
-            <a:endParaRPr lang="en-US" sz="2600" dirty="0"/>
+              <a:t>The people who want your cattle</a:t>
+            </a:r>
+            <a:endParaRPr lang="en-US" sz="2900" dirty="0"/>
+          </a:p>
+          <a:p>
+            <a:pPr indent="0" marL="0">
+              <a:lnSpc>
+                <a:spcPct val="102000"/>
+              </a:lnSpc>
+              <a:buNone/>
+            </a:pPr>
+            <a:r>
+              <a:rPr lang="en-US" sz="2900" b="1" dirty="0">
+                <a:solidFill>
+                  <a:srgbClr val="F5E6D3"/>
+                </a:solidFill>
+                <a:latin typeface="Georgia" pitchFamily="34" charset="0"/>
+                <a:ea typeface="Georgia" pitchFamily="34" charset="-122"/>
+                <a:cs typeface="Georgia" pitchFamily="34" charset="-120"/>
+              </a:rPr>
+              <a:t>aren't standing in the pen anymore.</a:t>
+            </a:r>
+            <a:endParaRPr lang="en-US" sz="2900" dirty="0"/>
           </a:p>
         </p:txBody>
       </p:sp>
@@ -1705,8 +1903,8 @@
         </p:nvSpPr>
         <p:spPr>
           <a:xfrm>
-            <a:off x="640080" y="1737360"/>
-            <a:ext cx="7772400" cy="502920"/>
+            <a:off x="640080" y="2514600"/>
+            <a:ext cx="7772400" cy="777240"/>
           </a:xfrm>
           <a:prstGeom prst="rect">
             <a:avLst/>
@@ -1720,470 +1918,140 @@
           <a:p>
             <a:pPr indent="0" marL="0">
               <a:lnSpc>
-                <a:spcPct val="100000"/>
+                <a:spcPct val="110000"/>
               </a:lnSpc>
               <a:buNone/>
             </a:pPr>
             <a:r>
-              <a:rPr lang="en-US" sz="1300" dirty="0">
-                <a:solidFill>
-                  <a:srgbClr val="7A4F47"/>
+              <a:rPr lang="en-US" sz="1550" dirty="0">
+                <a:solidFill>
+                  <a:srgbClr val="EADBC6"/>
                 </a:solidFill>
                 <a:latin typeface="Calibri" pitchFamily="34" charset="0"/>
                 <a:ea typeface="Calibri" pitchFamily="34" charset="-122"/>
                 <a:cs typeface="Calibri" pitchFamily="34" charset="-120"/>
               </a:rPr>
-              <a:t>Every sale day, the buyers who can't make the deposit or the drive don't disappear — they go to a group chat that can't even guarantee payment.</a:t>
-            </a:r>
-            <a:endParaRPr lang="en-US" sz="1300" dirty="0"/>
-          </a:p>
-        </p:txBody>
-      </p:sp>
-      <p:sp>
-        <p:nvSpPr>
-          <p:cNvPr id="6" name="Shape 4"/>
-          <p:cNvSpPr/>
-          <p:nvPr/>
-        </p:nvSpPr>
-        <p:spPr>
-          <a:xfrm>
-            <a:off x="640080" y="2331720"/>
-            <a:ext cx="2606040" cy="2148840"/>
-          </a:xfrm>
-          <a:prstGeom prst="rect">
-            <a:avLst/>
-          </a:prstGeom>
-          <a:solidFill>
-            <a:srgbClr val="2D1B1A"/>
-          </a:solidFill>
-          <a:ln/>
-        </p:spPr>
-      </p:sp>
-      <p:sp>
-        <p:nvSpPr>
-          <p:cNvPr id="7" name="Shape 5"/>
-          <p:cNvSpPr/>
-          <p:nvPr/>
-        </p:nvSpPr>
-        <p:spPr>
-          <a:xfrm>
-            <a:off x="640080" y="2331720"/>
-            <a:ext cx="73152" cy="2148840"/>
-          </a:xfrm>
-          <a:prstGeom prst="rect">
-            <a:avLst/>
-          </a:prstGeom>
-          <a:solidFill>
-            <a:srgbClr val="B85042"/>
-          </a:solidFill>
-          <a:ln/>
-        </p:spPr>
-      </p:sp>
-      <p:sp>
-        <p:nvSpPr>
-          <p:cNvPr id="8" name="Text 6"/>
-          <p:cNvSpPr/>
-          <p:nvPr/>
-        </p:nvSpPr>
-        <p:spPr>
-          <a:xfrm>
-            <a:off x="868680" y="2505456"/>
-            <a:ext cx="2194560" cy="530352"/>
-          </a:xfrm>
-          <a:prstGeom prst="rect">
-            <a:avLst/>
-          </a:prstGeom>
-          <a:noFill/>
-          <a:ln/>
-        </p:spPr>
-        <p:txBody>
-          <a:bodyPr wrap="square" lIns="0" tIns="0" rIns="0" bIns="0" rtlCol="0" anchor="t"/>
+              <a:t>They're in Harare offices. In Bulawayo. In Joburg and London. They have the money and the appetite — and a phone. The next generation of buyers grew up on EcoCash.</a:t>
+            </a:r>
+            <a:endParaRPr lang="en-US" sz="1550" dirty="0"/>
+          </a:p>
+        </p:txBody>
+      </p:sp>
+      <p:sp>
+        <p:nvSpPr>
+          <p:cNvPr id="6" name="Text 4"/>
+          <p:cNvSpPr/>
+          <p:nvPr/>
+        </p:nvSpPr>
+        <p:spPr>
+          <a:xfrm>
+            <a:off x="640080" y="3520440"/>
+            <a:ext cx="7772400" cy="777240"/>
+          </a:xfrm>
+          <a:prstGeom prst="rect">
+            <a:avLst/>
+          </a:prstGeom>
+          <a:noFill/>
+          <a:ln/>
+        </p:spPr>
+        <p:txBody>
+          <a:bodyPr wrap="square" lIns="0" tIns="0" rIns="0" bIns="0" rtlCol="0" anchor="ctr"/>
           <a:lstStyle/>
           <a:p>
             <a:pPr indent="0" marL="0">
               <a:lnSpc>
-                <a:spcPct val="100000"/>
+                <a:spcPct val="108000"/>
               </a:lnSpc>
               <a:buNone/>
             </a:pPr>
             <a:r>
-              <a:rPr lang="en-US" sz="1200" b="1" spc="100" kern="0" dirty="0">
+              <a:rPr lang="en-US" sz="1600" b="1" i="1" dirty="0">
                 <a:solidFill>
                   <a:srgbClr val="D4A843"/>
+                </a:solidFill>
+                <a:latin typeface="Georgia" pitchFamily="34" charset="0"/>
+                <a:ea typeface="Georgia" pitchFamily="34" charset="-122"/>
+                <a:cs typeface="Georgia" pitchFamily="34" charset="-120"/>
+              </a:rPr>
+              <a:t>Zimbabwe already moved its money onto the phone. The auction floor is one of the last rooms that still runs on cash and presence — and the trade is quietly leaving it.</a:t>
+            </a:r>
+            <a:endParaRPr lang="en-US" sz="1600" dirty="0"/>
+          </a:p>
+        </p:txBody>
+      </p:sp>
+      <p:sp>
+        <p:nvSpPr>
+          <p:cNvPr id="7" name="Text 5"/>
+          <p:cNvSpPr/>
+          <p:nvPr/>
+        </p:nvSpPr>
+        <p:spPr>
+          <a:xfrm>
+            <a:off x="457200" y="4846320"/>
+            <a:ext cx="7315200" cy="201168"/>
+          </a:xfrm>
+          <a:prstGeom prst="rect">
+            <a:avLst/>
+          </a:prstGeom>
+          <a:noFill/>
+          <a:ln/>
+        </p:spPr>
+        <p:txBody>
+          <a:bodyPr wrap="square" rtlCol="0" anchor="ctr"/>
+          <a:lstStyle/>
+          <a:p>
+            <a:pPr indent="0" marL="0">
+              <a:buNone/>
+            </a:pPr>
+            <a:r>
+              <a:rPr lang="en-US" sz="800" spc="300" kern="0" dirty="0">
+                <a:solidFill>
+                  <a:srgbClr val="BFAA98"/>
                 </a:solidFill>
                 <a:latin typeface="Calibri" pitchFamily="34" charset="0"/>
                 <a:ea typeface="Calibri" pitchFamily="34" charset="-122"/>
                 <a:cs typeface="Calibri" pitchFamily="34" charset="-120"/>
               </a:rPr>
-              <a:t>THE BUYERS YOU CAN'T REACH</a:t>
-            </a:r>
-            <a:endParaRPr lang="en-US" sz="1200" dirty="0"/>
-          </a:p>
-        </p:txBody>
-      </p:sp>
-      <p:sp>
-        <p:nvSpPr>
-          <p:cNvPr id="9" name="Text 7"/>
-          <p:cNvSpPr/>
-          <p:nvPr/>
-        </p:nvSpPr>
-        <p:spPr>
-          <a:xfrm>
-            <a:off x="868680" y="3090672"/>
-            <a:ext cx="2194560" cy="1298448"/>
-          </a:xfrm>
-          <a:prstGeom prst="rect">
-            <a:avLst/>
-          </a:prstGeom>
-          <a:noFill/>
-          <a:ln/>
-        </p:spPr>
-        <p:txBody>
-          <a:bodyPr wrap="square" lIns="0" tIns="0" rIns="0" bIns="0" rtlCol="0" anchor="ctr"/>
-          <a:lstStyle/>
-          <a:p>
-            <a:pPr indent="0" marL="0">
-              <a:lnSpc>
-                <a:spcPct val="105000"/>
-              </a:lnSpc>
-              <a:buNone/>
-            </a:pPr>
-            <a:r>
-              <a:rPr lang="en-US" sz="1200" dirty="0">
-                <a:solidFill>
-                  <a:srgbClr val="F5E6D3"/>
+              <a:t>MIMOO  ·  FOR ZIMBABWE'S AUCTION HOUSES</a:t>
+            </a:r>
+            <a:endParaRPr lang="en-US" sz="800" dirty="0"/>
+          </a:p>
+        </p:txBody>
+      </p:sp>
+      <p:sp>
+        <p:nvSpPr>
+          <p:cNvPr id="8" name="Text 6"/>
+          <p:cNvSpPr/>
+          <p:nvPr/>
+        </p:nvSpPr>
+        <p:spPr>
+          <a:xfrm>
+            <a:off x="8229600" y="4846320"/>
+            <a:ext cx="548640" cy="201168"/>
+          </a:xfrm>
+          <a:prstGeom prst="rect">
+            <a:avLst/>
+          </a:prstGeom>
+          <a:noFill/>
+          <a:ln/>
+        </p:spPr>
+        <p:txBody>
+          <a:bodyPr wrap="square" rtlCol="0" anchor="ctr"/>
+          <a:lstStyle/>
+          <a:p>
+            <a:pPr algn="r" indent="0" marL="0">
+              <a:buNone/>
+            </a:pPr>
+            <a:r>
+              <a:rPr lang="en-US" sz="800" dirty="0">
+                <a:solidFill>
+                  <a:srgbClr val="BFAA98"/>
                 </a:solidFill>
                 <a:latin typeface="Calibri" pitchFamily="34" charset="0"/>
                 <a:ea typeface="Calibri" pitchFamily="34" charset="-122"/>
                 <a:cs typeface="Calibri" pitchFamily="34" charset="-120"/>
               </a:rPr>
-              <a:t>Professionals, the diaspora, remote farmers — real money, kept out by distance and a US$1,000 deposit they'll never post for one beast.</a:t>
-            </a:r>
-            <a:endParaRPr lang="en-US" sz="1200" dirty="0"/>
-          </a:p>
-        </p:txBody>
-      </p:sp>
-      <p:sp>
-        <p:nvSpPr>
-          <p:cNvPr id="10" name="Shape 8"/>
-          <p:cNvSpPr/>
-          <p:nvPr/>
-        </p:nvSpPr>
-        <p:spPr>
-          <a:xfrm>
-            <a:off x="3383280" y="2331720"/>
-            <a:ext cx="2606040" cy="2148840"/>
-          </a:xfrm>
-          <a:prstGeom prst="rect">
-            <a:avLst/>
-          </a:prstGeom>
-          <a:solidFill>
-            <a:srgbClr val="2D1B1A"/>
-          </a:solidFill>
-          <a:ln/>
-        </p:spPr>
-      </p:sp>
-      <p:sp>
-        <p:nvSpPr>
-          <p:cNvPr id="11" name="Shape 9"/>
-          <p:cNvSpPr/>
-          <p:nvPr/>
-        </p:nvSpPr>
-        <p:spPr>
-          <a:xfrm>
-            <a:off x="3383280" y="2331720"/>
-            <a:ext cx="73152" cy="2148840"/>
-          </a:xfrm>
-          <a:prstGeom prst="rect">
-            <a:avLst/>
-          </a:prstGeom>
-          <a:solidFill>
-            <a:srgbClr val="B85042"/>
-          </a:solidFill>
-          <a:ln/>
-        </p:spPr>
-      </p:sp>
-      <p:sp>
-        <p:nvSpPr>
-          <p:cNvPr id="12" name="Text 10"/>
-          <p:cNvSpPr/>
-          <p:nvPr/>
-        </p:nvSpPr>
-        <p:spPr>
-          <a:xfrm>
-            <a:off x="3611880" y="2505456"/>
-            <a:ext cx="2194560" cy="530352"/>
-          </a:xfrm>
-          <a:prstGeom prst="rect">
-            <a:avLst/>
-          </a:prstGeom>
-          <a:noFill/>
-          <a:ln/>
-        </p:spPr>
-        <p:txBody>
-          <a:bodyPr wrap="square" lIns="0" tIns="0" rIns="0" bIns="0" rtlCol="0" anchor="t"/>
-          <a:lstStyle/>
-          <a:p>
-            <a:pPr indent="0" marL="0">
-              <a:lnSpc>
-                <a:spcPct val="100000"/>
-              </a:lnSpc>
-              <a:buNone/>
-            </a:pPr>
-            <a:r>
-              <a:rPr lang="en-US" sz="1200" b="1" spc="100" kern="0" dirty="0">
-                <a:solidFill>
-                  <a:srgbClr val="D4A843"/>
-                </a:solidFill>
-                <a:latin typeface="Calibri" pitchFamily="34" charset="0"/>
-                <a:ea typeface="Calibri" pitchFamily="34" charset="-122"/>
-                <a:cs typeface="Calibri" pitchFamily="34" charset="-120"/>
-              </a:rPr>
-              <a:t>THE LEAK TO WHATSAPP</a:t>
-            </a:r>
-            <a:endParaRPr lang="en-US" sz="1200" dirty="0"/>
-          </a:p>
-        </p:txBody>
-      </p:sp>
-      <p:sp>
-        <p:nvSpPr>
-          <p:cNvPr id="13" name="Text 11"/>
-          <p:cNvSpPr/>
-          <p:nvPr/>
-        </p:nvSpPr>
-        <p:spPr>
-          <a:xfrm>
-            <a:off x="3611880" y="3090672"/>
-            <a:ext cx="2194560" cy="1298448"/>
-          </a:xfrm>
-          <a:prstGeom prst="rect">
-            <a:avLst/>
-          </a:prstGeom>
-          <a:noFill/>
-          <a:ln/>
-        </p:spPr>
-        <p:txBody>
-          <a:bodyPr wrap="square" lIns="0" tIns="0" rIns="0" bIns="0" rtlCol="0" anchor="ctr"/>
-          <a:lstStyle/>
-          <a:p>
-            <a:pPr indent="0" marL="0">
-              <a:lnSpc>
-                <a:spcPct val="105000"/>
-              </a:lnSpc>
-              <a:buNone/>
-            </a:pPr>
-            <a:r>
-              <a:rPr lang="en-US" sz="1200" dirty="0">
-                <a:solidFill>
-                  <a:srgbClr val="F5E6D3"/>
-                </a:solidFill>
-                <a:latin typeface="Calibri" pitchFamily="34" charset="0"/>
-                <a:ea typeface="Calibri" pitchFamily="34" charset="-122"/>
-                <a:cs typeface="Calibri" pitchFamily="34" charset="-120"/>
-              </a:rPr>
-              <a:t>Unsettled, unverified, lower prices. Trades that should clear on your floor happen in a group chat — and your commission never sees them.</a:t>
-            </a:r>
-            <a:endParaRPr lang="en-US" sz="1200" dirty="0"/>
-          </a:p>
-        </p:txBody>
-      </p:sp>
-      <p:sp>
-        <p:nvSpPr>
-          <p:cNvPr id="14" name="Shape 12"/>
-          <p:cNvSpPr/>
-          <p:nvPr/>
-        </p:nvSpPr>
-        <p:spPr>
-          <a:xfrm>
-            <a:off x="6126480" y="2331720"/>
-            <a:ext cx="2606040" cy="2148840"/>
-          </a:xfrm>
-          <a:prstGeom prst="rect">
-            <a:avLst/>
-          </a:prstGeom>
-          <a:solidFill>
-            <a:srgbClr val="2D1B1A"/>
-          </a:solidFill>
-          <a:ln/>
-        </p:spPr>
-      </p:sp>
-      <p:sp>
-        <p:nvSpPr>
-          <p:cNvPr id="15" name="Shape 13"/>
-          <p:cNvSpPr/>
-          <p:nvPr/>
-        </p:nvSpPr>
-        <p:spPr>
-          <a:xfrm>
-            <a:off x="6126480" y="2331720"/>
-            <a:ext cx="73152" cy="2148840"/>
-          </a:xfrm>
-          <a:prstGeom prst="rect">
-            <a:avLst/>
-          </a:prstGeom>
-          <a:solidFill>
-            <a:srgbClr val="B85042"/>
-          </a:solidFill>
-          <a:ln/>
-        </p:spPr>
-      </p:sp>
-      <p:sp>
-        <p:nvSpPr>
-          <p:cNvPr id="16" name="Text 14"/>
-          <p:cNvSpPr/>
-          <p:nvPr/>
-        </p:nvSpPr>
-        <p:spPr>
-          <a:xfrm>
-            <a:off x="6355080" y="2505456"/>
-            <a:ext cx="2194560" cy="530352"/>
-          </a:xfrm>
-          <a:prstGeom prst="rect">
-            <a:avLst/>
-          </a:prstGeom>
-          <a:noFill/>
-          <a:ln/>
-        </p:spPr>
-        <p:txBody>
-          <a:bodyPr wrap="square" lIns="0" tIns="0" rIns="0" bIns="0" rtlCol="0" anchor="t"/>
-          <a:lstStyle/>
-          <a:p>
-            <a:pPr indent="0" marL="0">
-              <a:lnSpc>
-                <a:spcPct val="100000"/>
-              </a:lnSpc>
-              <a:buNone/>
-            </a:pPr>
-            <a:r>
-              <a:rPr lang="en-US" sz="1200" b="1" spc="100" kern="0" dirty="0">
-                <a:solidFill>
-                  <a:srgbClr val="D4A843"/>
-                </a:solidFill>
-                <a:latin typeface="Calibri" pitchFamily="34" charset="0"/>
-                <a:ea typeface="Calibri" pitchFamily="34" charset="-122"/>
-                <a:cs typeface="Calibri" pitchFamily="34" charset="-120"/>
-              </a:rPr>
-              <a:t>THE CASH &amp; NO-SHOW DRAG</a:t>
-            </a:r>
-            <a:endParaRPr lang="en-US" sz="1200" dirty="0"/>
-          </a:p>
-        </p:txBody>
-      </p:sp>
-      <p:sp>
-        <p:nvSpPr>
-          <p:cNvPr id="17" name="Text 15"/>
-          <p:cNvSpPr/>
-          <p:nvPr/>
-        </p:nvSpPr>
-        <p:spPr>
-          <a:xfrm>
-            <a:off x="6355080" y="3090672"/>
-            <a:ext cx="2194560" cy="1298448"/>
-          </a:xfrm>
-          <a:prstGeom prst="rect">
-            <a:avLst/>
-          </a:prstGeom>
-          <a:noFill/>
-          <a:ln/>
-        </p:spPr>
-        <p:txBody>
-          <a:bodyPr wrap="square" lIns="0" tIns="0" rIns="0" bIns="0" rtlCol="0" anchor="ctr"/>
-          <a:lstStyle/>
-          <a:p>
-            <a:pPr indent="0" marL="0">
-              <a:lnSpc>
-                <a:spcPct val="105000"/>
-              </a:lnSpc>
-              <a:buNone/>
-            </a:pPr>
-            <a:r>
-              <a:rPr lang="en-US" sz="1200" dirty="0">
-                <a:solidFill>
-                  <a:srgbClr val="F5E6D3"/>
-                </a:solidFill>
-                <a:latin typeface="Calibri" pitchFamily="34" charset="0"/>
-                <a:ea typeface="Calibri" pitchFamily="34" charset="-122"/>
-                <a:cs typeface="Calibri" pitchFamily="34" charset="-120"/>
-              </a:rPr>
-              <a:t>Cash handling, no-shows, slow payouts. Friction that eats your sale day and chips at the trust your floor is built on.</a:t>
-            </a:r>
-            <a:endParaRPr lang="en-US" sz="1200" dirty="0"/>
-          </a:p>
-        </p:txBody>
-      </p:sp>
-      <p:sp>
-        <p:nvSpPr>
-          <p:cNvPr id="18" name="Text 16"/>
-          <p:cNvSpPr/>
-          <p:nvPr/>
-        </p:nvSpPr>
-        <p:spPr>
-          <a:xfrm>
-            <a:off x="457200" y="4846320"/>
-            <a:ext cx="7315200" cy="201168"/>
-          </a:xfrm>
-          <a:prstGeom prst="rect">
-            <a:avLst/>
-          </a:prstGeom>
-          <a:noFill/>
-          <a:ln/>
-        </p:spPr>
-        <p:txBody>
-          <a:bodyPr wrap="square" rtlCol="0" anchor="ctr"/>
-          <a:lstStyle/>
-          <a:p>
-            <a:pPr indent="0" marL="0">
-              <a:buNone/>
-            </a:pPr>
-            <a:r>
-              <a:rPr lang="en-US" sz="800" spc="300" kern="0" dirty="0">
-                <a:solidFill>
-                  <a:srgbClr val="7A4F47"/>
-                </a:solidFill>
-                <a:latin typeface="Calibri" pitchFamily="34" charset="0"/>
-                <a:ea typeface="Calibri" pitchFamily="34" charset="-122"/>
-                <a:cs typeface="Calibri" pitchFamily="34" charset="-120"/>
-              </a:rPr>
-              <a:t>MIMOO  ·  FOR ZIMBABWE'S AUCTION HOUSES  ·  2026</a:t>
-            </a:r>
-            <a:endParaRPr lang="en-US" sz="800" dirty="0"/>
-          </a:p>
-        </p:txBody>
-      </p:sp>
-      <p:sp>
-        <p:nvSpPr>
-          <p:cNvPr id="19" name="Text 17"/>
-          <p:cNvSpPr/>
-          <p:nvPr/>
-        </p:nvSpPr>
-        <p:spPr>
-          <a:xfrm>
-            <a:off x="8229600" y="4846320"/>
-            <a:ext cx="548640" cy="201168"/>
-          </a:xfrm>
-          <a:prstGeom prst="rect">
-            <a:avLst/>
-          </a:prstGeom>
-          <a:noFill/>
-          <a:ln/>
-        </p:spPr>
-        <p:txBody>
-          <a:bodyPr wrap="square" rtlCol="0" anchor="ctr"/>
-          <a:lstStyle/>
-          <a:p>
-            <a:pPr algn="r" indent="0" marL="0">
-              <a:buNone/>
-            </a:pPr>
-            <a:r>
-              <a:rPr lang="en-US" sz="800" dirty="0">
-                <a:solidFill>
-                  <a:srgbClr val="7A4F47"/>
-                </a:solidFill>
-                <a:latin typeface="Calibri" pitchFamily="34" charset="0"/>
-                <a:ea typeface="Calibri" pitchFamily="34" charset="-122"/>
-                <a:cs typeface="Calibri" pitchFamily="34" charset="-120"/>
-              </a:rPr>
-              <a:t>2 / 6</a:t>
+              <a:t>2 / 8</a:t>
             </a:r>
             <a:endParaRPr lang="en-US" sz="800" dirty="0"/>
           </a:p>
@@ -2203,7 +2071,7 @@
     <p:bg>
       <p:bgPr>
         <a:solidFill>
-          <a:srgbClr val="F5E6D3"/>
+          <a:srgbClr val="2D1B1A"/>
         </a:solidFill>
       </p:bgPr>
     </p:bg>
@@ -2249,7 +2117,7 @@
         </p:nvSpPr>
         <p:spPr>
           <a:xfrm>
-            <a:off x="640080" y="457200"/>
+            <a:off x="640080" y="475488"/>
             <a:ext cx="7772400" cy="274320"/>
           </a:xfrm>
           <a:prstGeom prst="rect">
@@ -2268,13 +2136,13 @@
             <a:r>
               <a:rPr lang="en-US" sz="1100" b="1" spc="400" kern="0" dirty="0">
                 <a:solidFill>
-                  <a:srgbClr val="B85042"/>
+                  <a:srgbClr val="D4A843"/>
                 </a:solidFill>
                 <a:latin typeface="Calibri" pitchFamily="34" charset="0"/>
                 <a:ea typeface="Calibri" pitchFamily="34" charset="-122"/>
                 <a:cs typeface="Calibri" pitchFamily="34" charset="-120"/>
               </a:rPr>
-              <a:t>THE MONEY ON THE TABLE</a:t>
+              <a:t>WINNERS &amp; LOSERS</a:t>
             </a:r>
             <a:endParaRPr lang="en-US" sz="1100" dirty="0"/>
           </a:p>
@@ -2303,20 +2171,20 @@
           <a:p>
             <a:pPr indent="0" marL="0">
               <a:lnSpc>
-                <a:spcPct val="100000"/>
+                <a:spcPct val="102000"/>
               </a:lnSpc>
               <a:buNone/>
             </a:pPr>
             <a:r>
               <a:rPr lang="en-US" sz="2600" b="1" dirty="0">
                 <a:solidFill>
-                  <a:srgbClr val="2D1B1A"/>
+                  <a:srgbClr val="F5E6D3"/>
                 </a:solidFill>
                 <a:latin typeface="Georgia" pitchFamily="34" charset="0"/>
                 <a:ea typeface="Georgia" pitchFamily="34" charset="-122"/>
                 <a:cs typeface="Georgia" pitchFamily="34" charset="-120"/>
               </a:rPr>
-              <a:t>US$480,000 a year never reaches your room.</a:t>
+              <a:t>The trade doesn't wait. It routes around you.</a:t>
             </a:r>
             <a:endParaRPr lang="en-US" sz="2600" dirty="0"/>
           </a:p>
@@ -2330,8 +2198,8 @@
         </p:nvSpPr>
         <p:spPr>
           <a:xfrm>
-            <a:off x="640080" y="1737360"/>
-            <a:ext cx="7863840" cy="502920"/>
+            <a:off x="640080" y="1600200"/>
+            <a:ext cx="7863840" cy="868680"/>
           </a:xfrm>
           <a:prstGeom prst="rect">
             <a:avLst/>
@@ -2344,56 +2212,95 @@
           <a:lstStyle/>
           <a:p>
             <a:pPr indent="0" marL="0">
+              <a:buNone/>
+            </a:pPr>
+            <a:r>
+              <a:rPr lang="en-US" sz="6000" b="1" dirty="0">
+                <a:solidFill>
+                  <a:srgbClr val="D4A843"/>
+                </a:solidFill>
+                <a:latin typeface="Georgia" pitchFamily="34" charset="0"/>
+                <a:ea typeface="Georgia" pitchFamily="34" charset="-122"/>
+                <a:cs typeface="Georgia" pitchFamily="34" charset="-120"/>
+              </a:rPr>
+              <a:t>US$480,000</a:t>
+            </a:r>
+            <a:endParaRPr lang="en-US" sz="6000" dirty="0"/>
+          </a:p>
+        </p:txBody>
+      </p:sp>
+      <p:sp>
+        <p:nvSpPr>
+          <p:cNvPr id="6" name="Text 4"/>
+          <p:cNvSpPr/>
+          <p:nvPr/>
+        </p:nvSpPr>
+        <p:spPr>
+          <a:xfrm>
+            <a:off x="658368" y="2542032"/>
+            <a:ext cx="7680960" cy="548640"/>
+          </a:xfrm>
+          <a:prstGeom prst="rect">
+            <a:avLst/>
+          </a:prstGeom>
+          <a:noFill/>
+          <a:ln/>
+        </p:spPr>
+        <p:txBody>
+          <a:bodyPr wrap="square" lIns="0" tIns="0" rIns="0" bIns="0" rtlCol="0" anchor="ctr"/>
+          <a:lstStyle/>
+          <a:p>
+            <a:pPr indent="0" marL="0">
               <a:lnSpc>
-                <a:spcPct val="100000"/>
+                <a:spcPct val="105000"/>
               </a:lnSpc>
               <a:buNone/>
             </a:pPr>
             <a:r>
-              <a:rPr lang="en-US" sz="1300" dirty="0">
-                <a:solidFill>
-                  <a:srgbClr val="7A4F47"/>
+              <a:rPr lang="en-US" sz="1400" dirty="0">
+                <a:solidFill>
+                  <a:srgbClr val="EADBC6"/>
                 </a:solidFill>
                 <a:latin typeface="Calibri" pitchFamily="34" charset="0"/>
                 <a:ea typeface="Calibri" pitchFamily="34" charset="-122"/>
                 <a:cs typeface="Calibri" pitchFamily="34" charset="-120"/>
               </a:rPr>
-              <a:t>An anchor house clears ~US$4.8M across the floor a year. The locked-out buyers are demand worth roughly a tenth of it — that never settles with you.</a:t>
-            </a:r>
-            <a:endParaRPr lang="en-US" sz="1300" dirty="0"/>
-          </a:p>
-        </p:txBody>
-      </p:sp>
-      <p:sp>
-        <p:nvSpPr>
-          <p:cNvPr id="6" name="Shape 4"/>
-          <p:cNvSpPr/>
-          <p:nvPr/>
-        </p:nvSpPr>
-        <p:spPr>
-          <a:xfrm>
-            <a:off x="640080" y="2423160"/>
-            <a:ext cx="3200400" cy="1737360"/>
+              <a:t>a year already leaving an anchor floor for WhatsApp groups — unsettled, unverified, at lower prices. That demand doesn't disappear. It just stops being yours.</a:t>
+            </a:r>
+            <a:endParaRPr lang="en-US" sz="1400" dirty="0"/>
+          </a:p>
+        </p:txBody>
+      </p:sp>
+      <p:sp>
+        <p:nvSpPr>
+          <p:cNvPr id="7" name="Shape 5"/>
+          <p:cNvSpPr/>
+          <p:nvPr/>
+        </p:nvSpPr>
+        <p:spPr>
+          <a:xfrm>
+            <a:off x="640080" y="3383280"/>
+            <a:ext cx="91440" cy="457200"/>
           </a:xfrm>
           <a:prstGeom prst="rect">
             <a:avLst/>
           </a:prstGeom>
           <a:solidFill>
-            <a:srgbClr val="2D1B1A"/>
+            <a:srgbClr val="D4A843"/>
           </a:solidFill>
           <a:ln/>
         </p:spPr>
       </p:sp>
       <p:sp>
         <p:nvSpPr>
-          <p:cNvPr id="7" name="Text 5"/>
-          <p:cNvSpPr/>
-          <p:nvPr/>
-        </p:nvSpPr>
-        <p:spPr>
-          <a:xfrm>
-            <a:off x="731520" y="2606040"/>
-            <a:ext cx="3017520" cy="749808"/>
+          <p:cNvPr id="8" name="Text 6"/>
+          <p:cNvSpPr/>
+          <p:nvPr/>
+        </p:nvSpPr>
+        <p:spPr>
+          <a:xfrm>
+            <a:off x="868680" y="3337560"/>
+            <a:ext cx="7589520" cy="548640"/>
           </a:xfrm>
           <a:prstGeom prst="rect">
             <a:avLst/>
@@ -2405,53 +2312,14 @@
           <a:bodyPr wrap="square" lIns="0" tIns="0" rIns="0" bIns="0" rtlCol="0" anchor="ctr"/>
           <a:lstStyle/>
           <a:p>
-            <a:pPr algn="ctr" indent="0" marL="0">
-              <a:buNone/>
-            </a:pPr>
-            <a:r>
-              <a:rPr lang="en-US" sz="4200" b="1" dirty="0">
-                <a:solidFill>
-                  <a:srgbClr val="D4A843"/>
-                </a:solidFill>
-                <a:latin typeface="Georgia" pitchFamily="34" charset="0"/>
-                <a:ea typeface="Georgia" pitchFamily="34" charset="-122"/>
-                <a:cs typeface="Georgia" pitchFamily="34" charset="-120"/>
-              </a:rPr>
-              <a:t>US$480K</a:t>
-            </a:r>
-            <a:endParaRPr lang="en-US" sz="4200" dirty="0"/>
-          </a:p>
-        </p:txBody>
-      </p:sp>
-      <p:sp>
-        <p:nvSpPr>
-          <p:cNvPr id="8" name="Text 6"/>
-          <p:cNvSpPr/>
-          <p:nvPr/>
-        </p:nvSpPr>
-        <p:spPr>
-          <a:xfrm>
-            <a:off x="868680" y="3401568"/>
-            <a:ext cx="2743200" cy="685800"/>
-          </a:xfrm>
-          <a:prstGeom prst="rect">
-            <a:avLst/>
-          </a:prstGeom>
-          <a:noFill/>
-          <a:ln/>
-        </p:spPr>
-        <p:txBody>
-          <a:bodyPr wrap="square" lIns="0" tIns="0" rIns="0" bIns="0" rtlCol="0" anchor="ctr"/>
-          <a:lstStyle/>
-          <a:p>
-            <a:pPr algn="ctr" indent="0" marL="0">
+            <a:pPr indent="0" marL="0">
               <a:lnSpc>
                 <a:spcPct val="103000"/>
               </a:lnSpc>
               <a:buNone/>
             </a:pPr>
             <a:r>
-              <a:rPr lang="en-US" sz="1100" dirty="0">
+              <a:rPr lang="en-US" sz="1350" b="1" dirty="0">
                 <a:solidFill>
                   <a:srgbClr val="F5E6D3"/>
                 </a:solidFill>
@@ -2459,103 +2327,59 @@
                 <a:ea typeface="Calibri" pitchFamily="34" charset="-122"/>
                 <a:cs typeface="Calibri" pitchFamily="34" charset="-120"/>
               </a:rPr>
-              <a:t>demand leaking off an anchor floor every year — gone to WhatsApp, or never traded at all.</a:t>
-            </a:r>
-            <a:endParaRPr lang="en-US" sz="1100" dirty="0"/>
-          </a:p>
-        </p:txBody>
-      </p:sp>
-      <p:sp>
-        <p:nvSpPr>
-          <p:cNvPr id="9" name="Text 7"/>
-          <p:cNvSpPr/>
-          <p:nvPr/>
-        </p:nvSpPr>
-        <p:spPr>
-          <a:xfrm>
-            <a:off x="4160520" y="2468880"/>
-            <a:ext cx="1600200" cy="457200"/>
-          </a:xfrm>
-          <a:prstGeom prst="rect">
-            <a:avLst/>
-          </a:prstGeom>
-          <a:noFill/>
-          <a:ln/>
-        </p:spPr>
-        <p:txBody>
-          <a:bodyPr wrap="square" lIns="0" tIns="0" rIns="0" bIns="0" rtlCol="0" anchor="ctr"/>
-          <a:lstStyle/>
-          <a:p>
-            <a:pPr indent="0" marL="0">
-              <a:buNone/>
-            </a:pPr>
-            <a:r>
-              <a:rPr lang="en-US" sz="1800" b="1" dirty="0">
-                <a:solidFill>
-                  <a:srgbClr val="B85042"/>
-                </a:solidFill>
-                <a:latin typeface="Georgia" pitchFamily="34" charset="0"/>
-                <a:ea typeface="Georgia" pitchFamily="34" charset="-122"/>
-                <a:cs typeface="Georgia" pitchFamily="34" charset="-120"/>
-              </a:rPr>
-              <a:t>US$4.8M</a:t>
-            </a:r>
-            <a:endParaRPr lang="en-US" sz="1800" dirty="0"/>
-          </a:p>
-        </p:txBody>
-      </p:sp>
-      <p:sp>
-        <p:nvSpPr>
-          <p:cNvPr id="10" name="Text 8"/>
-          <p:cNvSpPr/>
-          <p:nvPr/>
-        </p:nvSpPr>
-        <p:spPr>
-          <a:xfrm>
-            <a:off x="5806440" y="2468880"/>
-            <a:ext cx="2788920" cy="457200"/>
-          </a:xfrm>
-          <a:prstGeom prst="rect">
-            <a:avLst/>
-          </a:prstGeom>
-          <a:noFill/>
-          <a:ln/>
-        </p:spPr>
-        <p:txBody>
-          <a:bodyPr wrap="square" lIns="0" tIns="0" rIns="0" bIns="0" rtlCol="0" anchor="ctr"/>
-          <a:lstStyle/>
-          <a:p>
+              <a:t>Open your floor.  </a:t>
+            </a:r>
             <a:pPr indent="0" marL="0">
               <a:lnSpc>
-                <a:spcPct val="100000"/>
+                <a:spcPct val="103000"/>
               </a:lnSpc>
               <a:buNone/>
             </a:pPr>
             <a:r>
-              <a:rPr lang="en-US" sz="1200" dirty="0">
-                <a:solidFill>
-                  <a:srgbClr val="2D1B1A"/>
+              <a:rPr lang="en-US" sz="1350" dirty="0">
+                <a:solidFill>
+                  <a:srgbClr val="BFAA98"/>
                 </a:solidFill>
                 <a:latin typeface="Calibri" pitchFamily="34" charset="0"/>
                 <a:ea typeface="Calibri" pitchFamily="34" charset="-122"/>
                 <a:cs typeface="Calibri" pitchFamily="34" charset="-120"/>
               </a:rPr>
-              <a:t>your floor's GMV a year (≈US$100k × 48 sale-days)</a:t>
-            </a:r>
-            <a:endParaRPr lang="en-US" sz="1200" dirty="0"/>
-          </a:p>
-        </p:txBody>
-      </p:sp>
-      <p:sp>
-        <p:nvSpPr>
-          <p:cNvPr id="11" name="Text 9"/>
-          <p:cNvSpPr/>
-          <p:nvPr/>
-        </p:nvSpPr>
-        <p:spPr>
-          <a:xfrm>
-            <a:off x="4160520" y="3017520"/>
-            <a:ext cx="1600200" cy="457200"/>
+              <a:t>deeper bidder pool, higher hammer prices, money the same day. You become the regional hub.</a:t>
+            </a:r>
+            <a:endParaRPr lang="en-US" sz="1350" dirty="0"/>
+          </a:p>
+        </p:txBody>
+      </p:sp>
+      <p:sp>
+        <p:nvSpPr>
+          <p:cNvPr id="9" name="Shape 7"/>
+          <p:cNvSpPr/>
+          <p:nvPr/>
+        </p:nvSpPr>
+        <p:spPr>
+          <a:xfrm>
+            <a:off x="640080" y="4041648"/>
+            <a:ext cx="91440" cy="457200"/>
+          </a:xfrm>
+          <a:prstGeom prst="rect">
+            <a:avLst/>
+          </a:prstGeom>
+          <a:solidFill>
+            <a:srgbClr val="B85042"/>
+          </a:solidFill>
+          <a:ln/>
+        </p:spPr>
+      </p:sp>
+      <p:sp>
+        <p:nvSpPr>
+          <p:cNvPr id="10" name="Text 8"/>
+          <p:cNvSpPr/>
+          <p:nvPr/>
+        </p:nvSpPr>
+        <p:spPr>
+          <a:xfrm>
+            <a:off x="868680" y="3995928"/>
+            <a:ext cx="7589520" cy="548640"/>
           </a:xfrm>
           <a:prstGeom prst="rect">
             <a:avLst/>
@@ -2568,320 +2392,116 @@
           <a:lstStyle/>
           <a:p>
             <a:pPr indent="0" marL="0">
-              <a:buNone/>
-            </a:pPr>
-            <a:r>
-              <a:rPr lang="en-US" sz="1800" b="1" dirty="0">
-                <a:solidFill>
-                  <a:srgbClr val="B85042"/>
-                </a:solidFill>
-                <a:latin typeface="Georgia" pitchFamily="34" charset="0"/>
-                <a:ea typeface="Georgia" pitchFamily="34" charset="-122"/>
-                <a:cs typeface="Georgia" pitchFamily="34" charset="-120"/>
-              </a:rPr>
-              <a:t>~10%</a:t>
-            </a:r>
-            <a:endParaRPr lang="en-US" sz="1800" dirty="0"/>
-          </a:p>
-        </p:txBody>
-      </p:sp>
-      <p:sp>
-        <p:nvSpPr>
-          <p:cNvPr id="12" name="Text 10"/>
-          <p:cNvSpPr/>
-          <p:nvPr/>
-        </p:nvSpPr>
-        <p:spPr>
-          <a:xfrm>
-            <a:off x="5806440" y="3017520"/>
-            <a:ext cx="2788920" cy="457200"/>
-          </a:xfrm>
-          <a:prstGeom prst="rect">
-            <a:avLst/>
-          </a:prstGeom>
-          <a:noFill/>
-          <a:ln/>
-        </p:spPr>
-        <p:txBody>
-          <a:bodyPr wrap="square" lIns="0" tIns="0" rIns="0" bIns="0" rtlCol="0" anchor="ctr"/>
-          <a:lstStyle/>
-          <a:p>
-            <a:pPr indent="0" marL="0">
               <a:lnSpc>
-                <a:spcPct val="100000"/>
+                <a:spcPct val="103000"/>
               </a:lnSpc>
               <a:buNone/>
             </a:pPr>
             <a:r>
-              <a:rPr lang="en-US" sz="1200" dirty="0">
-                <a:solidFill>
-                  <a:srgbClr val="2D1B1A"/>
+              <a:rPr lang="en-US" sz="1350" b="1" dirty="0">
+                <a:solidFill>
+                  <a:srgbClr val="F5E6D3"/>
                 </a:solidFill>
                 <a:latin typeface="Calibri" pitchFamily="34" charset="0"/>
                 <a:ea typeface="Calibri" pitchFamily="34" charset="-122"/>
                 <a:cs typeface="Calibri" pitchFamily="34" charset="-120"/>
               </a:rPr>
-              <a:t>locked-out demand that never reaches you</a:t>
-            </a:r>
-            <a:endParaRPr lang="en-US" sz="1200" dirty="0"/>
-          </a:p>
-        </p:txBody>
-      </p:sp>
-      <p:sp>
-        <p:nvSpPr>
-          <p:cNvPr id="13" name="Text 11"/>
-          <p:cNvSpPr/>
-          <p:nvPr/>
-        </p:nvSpPr>
-        <p:spPr>
-          <a:xfrm>
-            <a:off x="4160520" y="3566160"/>
-            <a:ext cx="1600200" cy="457200"/>
-          </a:xfrm>
-          <a:prstGeom prst="rect">
-            <a:avLst/>
-          </a:prstGeom>
-          <a:noFill/>
-          <a:ln/>
-        </p:spPr>
-        <p:txBody>
-          <a:bodyPr wrap="square" lIns="0" tIns="0" rIns="0" bIns="0" rtlCol="0" anchor="ctr"/>
-          <a:lstStyle/>
-          <a:p>
-            <a:pPr indent="0" marL="0">
-              <a:buNone/>
-            </a:pPr>
-            <a:r>
-              <a:rPr lang="en-US" sz="1800" b="1" dirty="0">
-                <a:solidFill>
-                  <a:srgbClr val="B85042"/>
-                </a:solidFill>
-                <a:latin typeface="Georgia" pitchFamily="34" charset="0"/>
-                <a:ea typeface="Georgia" pitchFamily="34" charset="-122"/>
-                <a:cs typeface="Georgia" pitchFamily="34" charset="-120"/>
-              </a:rPr>
-              <a:t>Recapture ½</a:t>
-            </a:r>
-            <a:endParaRPr lang="en-US" sz="1800" dirty="0"/>
-          </a:p>
-        </p:txBody>
-      </p:sp>
-      <p:sp>
-        <p:nvSpPr>
-          <p:cNvPr id="14" name="Text 12"/>
-          <p:cNvSpPr/>
-          <p:nvPr/>
-        </p:nvSpPr>
-        <p:spPr>
-          <a:xfrm>
-            <a:off x="5806440" y="3566160"/>
-            <a:ext cx="2788920" cy="457200"/>
-          </a:xfrm>
-          <a:prstGeom prst="rect">
-            <a:avLst/>
-          </a:prstGeom>
-          <a:noFill/>
-          <a:ln/>
-        </p:spPr>
-        <p:txBody>
-          <a:bodyPr wrap="square" lIns="0" tIns="0" rIns="0" bIns="0" rtlCol="0" anchor="ctr"/>
-          <a:lstStyle/>
-          <a:p>
+              <a:t>Stay cash-only.  </a:t>
+            </a:r>
             <a:pPr indent="0" marL="0">
               <a:lnSpc>
-                <a:spcPct val="100000"/>
+                <a:spcPct val="103000"/>
               </a:lnSpc>
               <a:buNone/>
             </a:pPr>
             <a:r>
-              <a:rPr lang="en-US" sz="1200" dirty="0">
-                <a:solidFill>
-                  <a:srgbClr val="2D1B1A"/>
+              <a:rPr lang="en-US" sz="1350" dirty="0">
+                <a:solidFill>
+                  <a:srgbClr val="BFAA98"/>
                 </a:solidFill>
                 <a:latin typeface="Calibri" pitchFamily="34" charset="0"/>
                 <a:ea typeface="Calibri" pitchFamily="34" charset="-122"/>
                 <a:cs typeface="Calibri" pitchFamily="34" charset="-120"/>
               </a:rPr>
-              <a:t>≈ US$29K more commission a year, at 12%</a:t>
-            </a:r>
-            <a:endParaRPr lang="en-US" sz="1200" dirty="0"/>
-          </a:p>
-        </p:txBody>
-      </p:sp>
-      <p:sp>
-        <p:nvSpPr>
-          <p:cNvPr id="15" name="Text 13"/>
-          <p:cNvSpPr/>
-          <p:nvPr/>
-        </p:nvSpPr>
-        <p:spPr>
-          <a:xfrm>
-            <a:off x="4160520" y="4114800"/>
-            <a:ext cx="4434840" cy="411480"/>
-          </a:xfrm>
-          <a:prstGeom prst="rect">
-            <a:avLst/>
-          </a:prstGeom>
-          <a:noFill/>
-          <a:ln/>
-        </p:spPr>
-        <p:txBody>
-          <a:bodyPr wrap="square" lIns="0" tIns="0" rIns="0" bIns="0" rtlCol="0" anchor="ctr"/>
-          <a:lstStyle/>
-          <a:p>
-            <a:pPr indent="0" marL="0">
-              <a:lnSpc>
-                <a:spcPct val="100000"/>
-              </a:lnSpc>
-              <a:buNone/>
-            </a:pPr>
-            <a:r>
-              <a:rPr lang="en-US" sz="1200" b="1" dirty="0">
-                <a:solidFill>
-                  <a:srgbClr val="2D1B1A"/>
+              <a:t>the buyers who moved on don't come back. The crowd thins, the prices soften, the trade goes elsewhere.</a:t>
+            </a:r>
+            <a:endParaRPr lang="en-US" sz="1350" dirty="0"/>
+          </a:p>
+        </p:txBody>
+      </p:sp>
+      <p:sp>
+        <p:nvSpPr>
+          <p:cNvPr id="11" name="Text 9"/>
+          <p:cNvSpPr/>
+          <p:nvPr/>
+        </p:nvSpPr>
+        <p:spPr>
+          <a:xfrm>
+            <a:off x="457200" y="4846320"/>
+            <a:ext cx="7315200" cy="201168"/>
+          </a:xfrm>
+          <a:prstGeom prst="rect">
+            <a:avLst/>
+          </a:prstGeom>
+          <a:noFill/>
+          <a:ln/>
+        </p:spPr>
+        <p:txBody>
+          <a:bodyPr wrap="square" rtlCol="0" anchor="ctr"/>
+          <a:lstStyle/>
+          <a:p>
+            <a:pPr indent="0" marL="0">
+              <a:buNone/>
+            </a:pPr>
+            <a:r>
+              <a:rPr lang="en-US" sz="800" spc="300" kern="0" dirty="0">
+                <a:solidFill>
+                  <a:srgbClr val="BFAA98"/>
                 </a:solidFill>
                 <a:latin typeface="Calibri" pitchFamily="34" charset="0"/>
                 <a:ea typeface="Calibri" pitchFamily="34" charset="-122"/>
                 <a:cs typeface="Calibri" pitchFamily="34" charset="-120"/>
               </a:rPr>
-              <a:t>Mimoo costs US$18K a year. </a:t>
-            </a:r>
-            <a:pPr indent="0" marL="0">
-              <a:lnSpc>
-                <a:spcPct val="100000"/>
-              </a:lnSpc>
-              <a:buNone/>
-            </a:pPr>
-            <a:r>
-              <a:rPr lang="en-US" sz="1200" i="1" dirty="0">
-                <a:solidFill>
-                  <a:srgbClr val="7A4F47"/>
+              <a:t>MIMOO  ·  FOR ZIMBABWE'S AUCTION HOUSES</a:t>
+            </a:r>
+            <a:endParaRPr lang="en-US" sz="800" dirty="0"/>
+          </a:p>
+        </p:txBody>
+      </p:sp>
+      <p:sp>
+        <p:nvSpPr>
+          <p:cNvPr id="12" name="Text 10"/>
+          <p:cNvSpPr/>
+          <p:nvPr/>
+        </p:nvSpPr>
+        <p:spPr>
+          <a:xfrm>
+            <a:off x="8229600" y="4846320"/>
+            <a:ext cx="548640" cy="201168"/>
+          </a:xfrm>
+          <a:prstGeom prst="rect">
+            <a:avLst/>
+          </a:prstGeom>
+          <a:noFill/>
+          <a:ln/>
+        </p:spPr>
+        <p:txBody>
+          <a:bodyPr wrap="square" rtlCol="0" anchor="ctr"/>
+          <a:lstStyle/>
+          <a:p>
+            <a:pPr algn="r" indent="0" marL="0">
+              <a:buNone/>
+            </a:pPr>
+            <a:r>
+              <a:rPr lang="en-US" sz="800" dirty="0">
+                <a:solidFill>
+                  <a:srgbClr val="BFAA98"/>
                 </a:solidFill>
                 <a:latin typeface="Calibri" pitchFamily="34" charset="0"/>
                 <a:ea typeface="Calibri" pitchFamily="34" charset="-122"/>
                 <a:cs typeface="Calibri" pitchFamily="34" charset="-120"/>
               </a:rPr>
-              <a:t>The math isn't close — and a fuller room lifts prices on everything else you sell.</a:t>
-            </a:r>
-            <a:endParaRPr lang="en-US" sz="1200" dirty="0"/>
-          </a:p>
-        </p:txBody>
-      </p:sp>
-      <p:sp>
-        <p:nvSpPr>
-          <p:cNvPr id="16" name="Text 14"/>
-          <p:cNvSpPr/>
-          <p:nvPr/>
-        </p:nvSpPr>
-        <p:spPr>
-          <a:xfrm>
-            <a:off x="640080" y="4315968"/>
-            <a:ext cx="3246120" cy="384048"/>
-          </a:xfrm>
-          <a:prstGeom prst="rect">
-            <a:avLst/>
-          </a:prstGeom>
-          <a:noFill/>
-          <a:ln/>
-        </p:spPr>
-        <p:txBody>
-          <a:bodyPr wrap="square" lIns="0" tIns="0" rIns="0" bIns="0" rtlCol="0" anchor="ctr"/>
-          <a:lstStyle/>
-          <a:p>
-            <a:pPr indent="0" marL="0">
-              <a:lnSpc>
-                <a:spcPct val="100000"/>
-              </a:lnSpc>
-              <a:buNone/>
-            </a:pPr>
-            <a:r>
-              <a:rPr lang="en-US" sz="900" i="1" dirty="0">
-                <a:solidFill>
-                  <a:srgbClr val="7A4F47"/>
-                </a:solidFill>
-                <a:latin typeface="Calibri" pitchFamily="34" charset="0"/>
-                <a:ea typeface="Calibri" pitchFamily="34" charset="-122"/>
-                <a:cs typeface="Calibri" pitchFamily="34" charset="-120"/>
-              </a:rPr>
-              <a:t>Illustrative for a US$80–120k sale-day house. We'll run your real numbers on the pilot.</a:t>
-            </a:r>
-            <a:endParaRPr lang="en-US" sz="900" dirty="0"/>
-          </a:p>
-        </p:txBody>
-      </p:sp>
-      <p:sp>
-        <p:nvSpPr>
-          <p:cNvPr id="17" name="Text 15"/>
-          <p:cNvSpPr/>
-          <p:nvPr/>
-        </p:nvSpPr>
-        <p:spPr>
-          <a:xfrm>
-            <a:off x="457200" y="4846320"/>
-            <a:ext cx="7315200" cy="201168"/>
-          </a:xfrm>
-          <a:prstGeom prst="rect">
-            <a:avLst/>
-          </a:prstGeom>
-          <a:noFill/>
-          <a:ln/>
-        </p:spPr>
-        <p:txBody>
-          <a:bodyPr wrap="square" rtlCol="0" anchor="ctr"/>
-          <a:lstStyle/>
-          <a:p>
-            <a:pPr indent="0" marL="0">
-              <a:buNone/>
-            </a:pPr>
-            <a:r>
-              <a:rPr lang="en-US" sz="800" spc="300" kern="0" dirty="0">
-                <a:solidFill>
-                  <a:srgbClr val="7A4F47"/>
-                </a:solidFill>
-                <a:latin typeface="Calibri" pitchFamily="34" charset="0"/>
-                <a:ea typeface="Calibri" pitchFamily="34" charset="-122"/>
-                <a:cs typeface="Calibri" pitchFamily="34" charset="-120"/>
-              </a:rPr>
-              <a:t>MIMOO  ·  FOR ZIMBABWE'S AUCTION HOUSES  ·  2026</a:t>
-            </a:r>
-            <a:endParaRPr lang="en-US" sz="800" dirty="0"/>
-          </a:p>
-        </p:txBody>
-      </p:sp>
-      <p:sp>
-        <p:nvSpPr>
-          <p:cNvPr id="18" name="Text 16"/>
-          <p:cNvSpPr/>
-          <p:nvPr/>
-        </p:nvSpPr>
-        <p:spPr>
-          <a:xfrm>
-            <a:off x="8229600" y="4846320"/>
-            <a:ext cx="548640" cy="201168"/>
-          </a:xfrm>
-          <a:prstGeom prst="rect">
-            <a:avLst/>
-          </a:prstGeom>
-          <a:noFill/>
-          <a:ln/>
-        </p:spPr>
-        <p:txBody>
-          <a:bodyPr wrap="square" rtlCol="0" anchor="ctr"/>
-          <a:lstStyle/>
-          <a:p>
-            <a:pPr algn="r" indent="0" marL="0">
-              <a:buNone/>
-            </a:pPr>
-            <a:r>
-              <a:rPr lang="en-US" sz="800" dirty="0">
-                <a:solidFill>
-                  <a:srgbClr val="7A4F47"/>
-                </a:solidFill>
-                <a:latin typeface="Calibri" pitchFamily="34" charset="0"/>
-                <a:ea typeface="Calibri" pitchFamily="34" charset="-122"/>
-                <a:cs typeface="Calibri" pitchFamily="34" charset="-120"/>
-              </a:rPr>
-              <a:t>3 / 6</a:t>
+              <a:t>3 / 8</a:t>
             </a:r>
             <a:endParaRPr lang="en-US" sz="800" dirty="0"/>
           </a:p>
@@ -2947,7 +2567,7 @@
         </p:nvSpPr>
         <p:spPr>
           <a:xfrm>
-            <a:off x="640080" y="457200"/>
+            <a:off x="640080" y="475488"/>
             <a:ext cx="7772400" cy="274320"/>
           </a:xfrm>
           <a:prstGeom prst="rect">
@@ -2972,7 +2592,7 @@
                 <a:ea typeface="Calibri" pitchFamily="34" charset="-122"/>
                 <a:cs typeface="Calibri" pitchFamily="34" charset="-120"/>
               </a:rPr>
-              <a:t>THE SOLUTION</a:t>
+              <a:t>WHERE THIS GOES</a:t>
             </a:r>
             <a:endParaRPr lang="en-US" sz="1100" dirty="0"/>
           </a:p>
@@ -2987,7 +2607,7 @@
         <p:spPr>
           <a:xfrm>
             <a:off x="640080" y="868680"/>
-            <a:ext cx="7955280" cy="914400"/>
+            <a:ext cx="7955280" cy="777240"/>
           </a:xfrm>
           <a:prstGeom prst="rect">
             <a:avLst/>
@@ -3001,7 +2621,7 @@
           <a:p>
             <a:pPr indent="0" marL="0">
               <a:lnSpc>
-                <a:spcPct val="100000"/>
+                <a:spcPct val="102000"/>
               </a:lnSpc>
               <a:buNone/>
             </a:pPr>
@@ -3014,61 +2634,142 @@
                 <a:ea typeface="Georgia" pitchFamily="34" charset="-122"/>
                 <a:cs typeface="Georgia" pitchFamily="34" charset="-120"/>
               </a:rPr>
-              <a:t>You don't get disrupted by digital.</a:t>
+              <a:t>Your auction — with the whole country in the room.</a:t>
             </a:r>
             <a:endParaRPr lang="en-US" sz="2600" dirty="0"/>
           </a:p>
+        </p:txBody>
+      </p:sp>
+      <p:sp>
+        <p:nvSpPr>
+          <p:cNvPr id="5" name="Text 3"/>
+          <p:cNvSpPr/>
+          <p:nvPr/>
+        </p:nvSpPr>
+        <p:spPr>
+          <a:xfrm>
+            <a:off x="640080" y="1828800"/>
+            <a:ext cx="7772400" cy="1005840"/>
+          </a:xfrm>
+          <a:prstGeom prst="rect">
+            <a:avLst/>
+          </a:prstGeom>
+          <a:noFill/>
+          <a:ln/>
+        </p:spPr>
+        <p:txBody>
+          <a:bodyPr wrap="square" lIns="0" tIns="0" rIns="0" bIns="0" rtlCol="0" anchor="ctr"/>
+          <a:lstStyle/>
           <a:p>
             <a:pPr indent="0" marL="0">
               <a:lnSpc>
-                <a:spcPct val="100000"/>
+                <a:spcPct val="118000"/>
               </a:lnSpc>
               <a:buNone/>
             </a:pPr>
             <a:r>
-              <a:rPr lang="en-US" sz="2600" b="1" dirty="0">
+              <a:rPr lang="en-US" sz="1700" dirty="0">
                 <a:solidFill>
                   <a:srgbClr val="2D1B1A"/>
+                </a:solidFill>
+                <a:latin typeface="Calibri" pitchFamily="34" charset="0"/>
+                <a:ea typeface="Calibri" pitchFamily="34" charset="-122"/>
+                <a:cs typeface="Calibri" pitchFamily="34" charset="-120"/>
+              </a:rPr>
+              <a:t>Picture your next sale day. The pen is full — and so is the line of bidders you can't see: the doctor in Harare, the son in Joburg, the farmer two provinces over, all raising their hands in real time.</a:t>
+            </a:r>
+            <a:endParaRPr lang="en-US" sz="1700" dirty="0"/>
+          </a:p>
+        </p:txBody>
+      </p:sp>
+      <p:sp>
+        <p:nvSpPr>
+          <p:cNvPr id="6" name="Shape 4"/>
+          <p:cNvSpPr/>
+          <p:nvPr/>
+        </p:nvSpPr>
+        <p:spPr>
+          <a:xfrm>
+            <a:off x="640080" y="3154680"/>
+            <a:ext cx="91440" cy="1143000"/>
+          </a:xfrm>
+          <a:prstGeom prst="rect">
+            <a:avLst/>
+          </a:prstGeom>
+          <a:solidFill>
+            <a:srgbClr val="B85042"/>
+          </a:solidFill>
+          <a:ln/>
+        </p:spPr>
+      </p:sp>
+      <p:sp>
+        <p:nvSpPr>
+          <p:cNvPr id="7" name="Text 5"/>
+          <p:cNvSpPr/>
+          <p:nvPr/>
+        </p:nvSpPr>
+        <p:spPr>
+          <a:xfrm>
+            <a:off x="896112" y="3200400"/>
+            <a:ext cx="7498080" cy="1097280"/>
+          </a:xfrm>
+          <a:prstGeom prst="rect">
+            <a:avLst/>
+          </a:prstGeom>
+          <a:noFill/>
+          <a:ln/>
+        </p:spPr>
+        <p:txBody>
+          <a:bodyPr wrap="square" lIns="0" tIns="0" rIns="0" bIns="0" rtlCol="0" anchor="ctr"/>
+          <a:lstStyle/>
+          <a:p>
+            <a:pPr indent="0" marL="0">
+              <a:lnSpc>
+                <a:spcPct val="112000"/>
+              </a:lnSpc>
+              <a:buNone/>
+            </a:pPr>
+            <a:r>
+              <a:rPr lang="en-US" sz="2000" b="1" i="1" dirty="0">
+                <a:solidFill>
+                  <a:srgbClr val="B85042"/>
                 </a:solidFill>
                 <a:latin typeface="Georgia" pitchFamily="34" charset="0"/>
                 <a:ea typeface="Georgia" pitchFamily="34" charset="-122"/>
                 <a:cs typeface="Georgia" pitchFamily="34" charset="-120"/>
               </a:rPr>
-              <a:t>You become the digital floor.</a:t>
-            </a:r>
-            <a:endParaRPr lang="en-US" sz="2600" dirty="0"/>
-          </a:p>
-        </p:txBody>
-      </p:sp>
-      <p:sp>
-        <p:nvSpPr>
-          <p:cNvPr id="5" name="Text 3"/>
-          <p:cNvSpPr/>
-          <p:nvPr/>
-        </p:nvSpPr>
-        <p:spPr>
-          <a:xfrm>
-            <a:off x="640080" y="1828800"/>
-            <a:ext cx="7863840" cy="502920"/>
-          </a:xfrm>
-          <a:prstGeom prst="rect">
-            <a:avLst/>
-          </a:prstGeom>
-          <a:noFill/>
-          <a:ln/>
-        </p:spPr>
-        <p:txBody>
-          <a:bodyPr wrap="square" lIns="0" tIns="0" rIns="0" bIns="0" rtlCol="0" anchor="ctr"/>
-          <a:lstStyle/>
-          <a:p>
-            <a:pPr indent="0" marL="0">
-              <a:lnSpc>
-                <a:spcPct val="100000"/>
-              </a:lnSpc>
-              <a:buNone/>
-            </a:pPr>
-            <a:r>
-              <a:rPr lang="en-US" sz="1300" dirty="0">
+              <a:t>The hammer falls higher. The money lands before the truck leaves the gate. And it is still your floor, your auctioneer, your name on the sale.</a:t>
+            </a:r>
+            <a:endParaRPr lang="en-US" sz="2000" dirty="0"/>
+          </a:p>
+        </p:txBody>
+      </p:sp>
+      <p:sp>
+        <p:nvSpPr>
+          <p:cNvPr id="8" name="Text 6"/>
+          <p:cNvSpPr/>
+          <p:nvPr/>
+        </p:nvSpPr>
+        <p:spPr>
+          <a:xfrm>
+            <a:off x="457200" y="4846320"/>
+            <a:ext cx="7315200" cy="201168"/>
+          </a:xfrm>
+          <a:prstGeom prst="rect">
+            <a:avLst/>
+          </a:prstGeom>
+          <a:noFill/>
+          <a:ln/>
+        </p:spPr>
+        <p:txBody>
+          <a:bodyPr wrap="square" rtlCol="0" anchor="ctr"/>
+          <a:lstStyle/>
+          <a:p>
+            <a:pPr indent="0" marL="0">
+              <a:buNone/>
+            </a:pPr>
+            <a:r>
+              <a:rPr lang="en-US" sz="800" spc="300" kern="0" dirty="0">
                 <a:solidFill>
                   <a:srgbClr val="7A4F47"/>
                 </a:solidFill>
@@ -3076,484 +2777,46 @@
                 <a:ea typeface="Calibri" pitchFamily="34" charset="-122"/>
                 <a:cs typeface="Calibri" pitchFamily="34" charset="-120"/>
               </a:rPr>
-              <a:t>Mimoo adds remote and diaspora bidders to your live sale — your brand, your auctioneer, your fees — and settles every win instantly on Paynow.</a:t>
-            </a:r>
-            <a:endParaRPr lang="en-US" sz="1300" dirty="0"/>
-          </a:p>
-        </p:txBody>
-      </p:sp>
-      <p:sp>
-        <p:nvSpPr>
-          <p:cNvPr id="6" name="Shape 4"/>
-          <p:cNvSpPr/>
-          <p:nvPr/>
-        </p:nvSpPr>
-        <p:spPr>
-          <a:xfrm>
-            <a:off x="640080" y="2651760"/>
-            <a:ext cx="2606040" cy="1554480"/>
-          </a:xfrm>
-          <a:prstGeom prst="rect">
-            <a:avLst/>
-          </a:prstGeom>
-          <a:solidFill>
-            <a:srgbClr val="FFFFFF"/>
-          </a:solidFill>
-          <a:ln w="12700">
-            <a:solidFill>
-              <a:srgbClr val="D4A843"/>
-            </a:solidFill>
-            <a:prstDash val="solid"/>
-          </a:ln>
-          <a:effectLst>
-            <a:outerShdw sx="100000" sy="100000" kx="0" ky="0" algn="bl" rotWithShape="0" blurRad="88900" dist="25400" dir="5400000">
-              <a:srgbClr val="000000">
-                <a:alpha val="8000"/>
-              </a:srgbClr>
-            </a:outerShdw>
-          </a:effectLst>
-        </p:spPr>
-      </p:sp>
-      <p:sp>
-        <p:nvSpPr>
-          <p:cNvPr id="7" name="Shape 5"/>
-          <p:cNvSpPr/>
-          <p:nvPr/>
-        </p:nvSpPr>
-        <p:spPr>
-          <a:xfrm>
-            <a:off x="868680" y="2862072"/>
-            <a:ext cx="182880" cy="182880"/>
-          </a:xfrm>
-          <a:prstGeom prst="ellipse">
-            <a:avLst/>
-          </a:prstGeom>
-          <a:solidFill>
-            <a:srgbClr val="B85042"/>
-          </a:solidFill>
-          <a:ln/>
-        </p:spPr>
-      </p:sp>
-      <p:sp>
-        <p:nvSpPr>
-          <p:cNvPr id="8" name="Text 6"/>
-          <p:cNvSpPr/>
-          <p:nvPr/>
-        </p:nvSpPr>
-        <p:spPr>
-          <a:xfrm>
-            <a:off x="1152144" y="2798064"/>
-            <a:ext cx="1892808" cy="292608"/>
-          </a:xfrm>
-          <a:prstGeom prst="rect">
-            <a:avLst/>
-          </a:prstGeom>
-          <a:noFill/>
-          <a:ln/>
-        </p:spPr>
-        <p:txBody>
-          <a:bodyPr wrap="square" lIns="0" tIns="0" rIns="0" bIns="0" rtlCol="0" anchor="ctr"/>
-          <a:lstStyle/>
-          <a:p>
-            <a:pPr indent="0" marL="0">
-              <a:buNone/>
-            </a:pPr>
-            <a:r>
-              <a:rPr lang="en-US" sz="1200" b="1" spc="100" kern="0" dirty="0">
-                <a:solidFill>
-                  <a:srgbClr val="B85042"/>
+              <a:t>MIMOO  ·  FOR ZIMBABWE'S AUCTION HOUSES</a:t>
+            </a:r>
+            <a:endParaRPr lang="en-US" sz="800" dirty="0"/>
+          </a:p>
+        </p:txBody>
+      </p:sp>
+      <p:sp>
+        <p:nvSpPr>
+          <p:cNvPr id="9" name="Text 7"/>
+          <p:cNvSpPr/>
+          <p:nvPr/>
+        </p:nvSpPr>
+        <p:spPr>
+          <a:xfrm>
+            <a:off x="8229600" y="4846320"/>
+            <a:ext cx="548640" cy="201168"/>
+          </a:xfrm>
+          <a:prstGeom prst="rect">
+            <a:avLst/>
+          </a:prstGeom>
+          <a:noFill/>
+          <a:ln/>
+        </p:spPr>
+        <p:txBody>
+          <a:bodyPr wrap="square" rtlCol="0" anchor="ctr"/>
+          <a:lstStyle/>
+          <a:p>
+            <a:pPr algn="r" indent="0" marL="0">
+              <a:buNone/>
+            </a:pPr>
+            <a:r>
+              <a:rPr lang="en-US" sz="800" dirty="0">
+                <a:solidFill>
+                  <a:srgbClr val="7A4F47"/>
                 </a:solidFill>
                 <a:latin typeface="Calibri" pitchFamily="34" charset="0"/>
                 <a:ea typeface="Calibri" pitchFamily="34" charset="-122"/>
                 <a:cs typeface="Calibri" pitchFamily="34" charset="-120"/>
               </a:rPr>
-              <a:t>YOUR BRAND</a:t>
-            </a:r>
-            <a:endParaRPr lang="en-US" sz="1200" dirty="0"/>
-          </a:p>
-        </p:txBody>
-      </p:sp>
-      <p:sp>
-        <p:nvSpPr>
-          <p:cNvPr id="9" name="Text 7"/>
-          <p:cNvSpPr/>
-          <p:nvPr/>
-        </p:nvSpPr>
-        <p:spPr>
-          <a:xfrm>
-            <a:off x="868680" y="3200400"/>
-            <a:ext cx="2148840" cy="914400"/>
-          </a:xfrm>
-          <a:prstGeom prst="rect">
-            <a:avLst/>
-          </a:prstGeom>
-          <a:noFill/>
-          <a:ln/>
-        </p:spPr>
-        <p:txBody>
-          <a:bodyPr wrap="square" lIns="0" tIns="0" rIns="0" bIns="0" rtlCol="0" anchor="ctr"/>
-          <a:lstStyle/>
-          <a:p>
-            <a:pPr indent="0" marL="0">
-              <a:lnSpc>
-                <a:spcPct val="105000"/>
-              </a:lnSpc>
-              <a:buNone/>
-            </a:pPr>
-            <a:r>
-              <a:rPr lang="en-US" sz="1150" dirty="0">
-                <a:solidFill>
-                  <a:srgbClr val="2D1B1A"/>
-                </a:solidFill>
-                <a:latin typeface="Calibri" pitchFamily="34" charset="0"/>
-                <a:ea typeface="Calibri" pitchFamily="34" charset="-122"/>
-                <a:cs typeface="Calibri" pitchFamily="34" charset="-120"/>
-              </a:rPr>
-              <a:t>White-label. The floor stays yours; Mimoo is the rails behind it. Your book, your buyers, your data — yours alone.</a:t>
-            </a:r>
-            <a:endParaRPr lang="en-US" sz="1150" dirty="0"/>
-          </a:p>
-        </p:txBody>
-      </p:sp>
-      <p:sp>
-        <p:nvSpPr>
-          <p:cNvPr id="10" name="Shape 8"/>
-          <p:cNvSpPr/>
-          <p:nvPr/>
-        </p:nvSpPr>
-        <p:spPr>
-          <a:xfrm>
-            <a:off x="3383280" y="2651760"/>
-            <a:ext cx="2606040" cy="1554480"/>
-          </a:xfrm>
-          <a:prstGeom prst="rect">
-            <a:avLst/>
-          </a:prstGeom>
-          <a:solidFill>
-            <a:srgbClr val="FFFFFF"/>
-          </a:solidFill>
-          <a:ln w="12700">
-            <a:solidFill>
-              <a:srgbClr val="D4A843"/>
-            </a:solidFill>
-            <a:prstDash val="solid"/>
-          </a:ln>
-          <a:effectLst>
-            <a:outerShdw sx="100000" sy="100000" kx="0" ky="0" algn="bl" rotWithShape="0" blurRad="88900" dist="25400" dir="5400000">
-              <a:srgbClr val="000000">
-                <a:alpha val="8000"/>
-              </a:srgbClr>
-            </a:outerShdw>
-          </a:effectLst>
-        </p:spPr>
-      </p:sp>
-      <p:sp>
-        <p:nvSpPr>
-          <p:cNvPr id="11" name="Shape 9"/>
-          <p:cNvSpPr/>
-          <p:nvPr/>
-        </p:nvSpPr>
-        <p:spPr>
-          <a:xfrm>
-            <a:off x="3611880" y="2862072"/>
-            <a:ext cx="182880" cy="182880"/>
-          </a:xfrm>
-          <a:prstGeom prst="ellipse">
-            <a:avLst/>
-          </a:prstGeom>
-          <a:solidFill>
-            <a:srgbClr val="B85042"/>
-          </a:solidFill>
-          <a:ln/>
-        </p:spPr>
-      </p:sp>
-      <p:sp>
-        <p:nvSpPr>
-          <p:cNvPr id="12" name="Text 10"/>
-          <p:cNvSpPr/>
-          <p:nvPr/>
-        </p:nvSpPr>
-        <p:spPr>
-          <a:xfrm>
-            <a:off x="3895344" y="2798064"/>
-            <a:ext cx="1892808" cy="292608"/>
-          </a:xfrm>
-          <a:prstGeom prst="rect">
-            <a:avLst/>
-          </a:prstGeom>
-          <a:noFill/>
-          <a:ln/>
-        </p:spPr>
-        <p:txBody>
-          <a:bodyPr wrap="square" lIns="0" tIns="0" rIns="0" bIns="0" rtlCol="0" anchor="ctr"/>
-          <a:lstStyle/>
-          <a:p>
-            <a:pPr indent="0" marL="0">
-              <a:buNone/>
-            </a:pPr>
-            <a:r>
-              <a:rPr lang="en-US" sz="1200" b="1" spc="100" kern="0" dirty="0">
-                <a:solidFill>
-                  <a:srgbClr val="B85042"/>
-                </a:solidFill>
-                <a:latin typeface="Calibri" pitchFamily="34" charset="0"/>
-                <a:ea typeface="Calibri" pitchFamily="34" charset="-122"/>
-                <a:cs typeface="Calibri" pitchFamily="34" charset="-120"/>
-              </a:rPr>
-              <a:t>YOUR FLOOR, FULLER</a:t>
-            </a:r>
-            <a:endParaRPr lang="en-US" sz="1200" dirty="0"/>
-          </a:p>
-        </p:txBody>
-      </p:sp>
-      <p:sp>
-        <p:nvSpPr>
-          <p:cNvPr id="13" name="Text 11"/>
-          <p:cNvSpPr/>
-          <p:nvPr/>
-        </p:nvSpPr>
-        <p:spPr>
-          <a:xfrm>
-            <a:off x="3611880" y="3200400"/>
-            <a:ext cx="2148840" cy="914400"/>
-          </a:xfrm>
-          <a:prstGeom prst="rect">
-            <a:avLst/>
-          </a:prstGeom>
-          <a:noFill/>
-          <a:ln/>
-        </p:spPr>
-        <p:txBody>
-          <a:bodyPr wrap="square" lIns="0" tIns="0" rIns="0" bIns="0" rtlCol="0" anchor="ctr"/>
-          <a:lstStyle/>
-          <a:p>
-            <a:pPr indent="0" marL="0">
-              <a:lnSpc>
-                <a:spcPct val="105000"/>
-              </a:lnSpc>
-              <a:buNone/>
-            </a:pPr>
-            <a:r>
-              <a:rPr lang="en-US" sz="1150" dirty="0">
-                <a:solidFill>
-                  <a:srgbClr val="2D1B1A"/>
-                </a:solidFill>
-                <a:latin typeface="Calibri" pitchFamily="34" charset="0"/>
-                <a:ea typeface="Calibri" pitchFamily="34" charset="-122"/>
-                <a:cs typeface="Calibri" pitchFamily="34" charset="-120"/>
-              </a:rPr>
-              <a:t>Hybrid: the auctioneer still runs the room; remote bids stream in alongside. More demand, same urgency.</a:t>
-            </a:r>
-            <a:endParaRPr lang="en-US" sz="1150" dirty="0"/>
-          </a:p>
-        </p:txBody>
-      </p:sp>
-      <p:sp>
-        <p:nvSpPr>
-          <p:cNvPr id="14" name="Shape 12"/>
-          <p:cNvSpPr/>
-          <p:nvPr/>
-        </p:nvSpPr>
-        <p:spPr>
-          <a:xfrm>
-            <a:off x="6126480" y="2651760"/>
-            <a:ext cx="2606040" cy="1554480"/>
-          </a:xfrm>
-          <a:prstGeom prst="rect">
-            <a:avLst/>
-          </a:prstGeom>
-          <a:solidFill>
-            <a:srgbClr val="FFFFFF"/>
-          </a:solidFill>
-          <a:ln w="12700">
-            <a:solidFill>
-              <a:srgbClr val="D4A843"/>
-            </a:solidFill>
-            <a:prstDash val="solid"/>
-          </a:ln>
-          <a:effectLst>
-            <a:outerShdw sx="100000" sy="100000" kx="0" ky="0" algn="bl" rotWithShape="0" blurRad="88900" dist="25400" dir="5400000">
-              <a:srgbClr val="000000">
-                <a:alpha val="8000"/>
-              </a:srgbClr>
-            </a:outerShdw>
-          </a:effectLst>
-        </p:spPr>
-      </p:sp>
-      <p:sp>
-        <p:nvSpPr>
-          <p:cNvPr id="15" name="Shape 13"/>
-          <p:cNvSpPr/>
-          <p:nvPr/>
-        </p:nvSpPr>
-        <p:spPr>
-          <a:xfrm>
-            <a:off x="6355080" y="2862072"/>
-            <a:ext cx="182880" cy="182880"/>
-          </a:xfrm>
-          <a:prstGeom prst="ellipse">
-            <a:avLst/>
-          </a:prstGeom>
-          <a:solidFill>
-            <a:srgbClr val="B85042"/>
-          </a:solidFill>
-          <a:ln/>
-        </p:spPr>
-      </p:sp>
-      <p:sp>
-        <p:nvSpPr>
-          <p:cNvPr id="16" name="Text 14"/>
-          <p:cNvSpPr/>
-          <p:nvPr/>
-        </p:nvSpPr>
-        <p:spPr>
-          <a:xfrm>
-            <a:off x="6638544" y="2798064"/>
-            <a:ext cx="1892808" cy="292608"/>
-          </a:xfrm>
-          <a:prstGeom prst="rect">
-            <a:avLst/>
-          </a:prstGeom>
-          <a:noFill/>
-          <a:ln/>
-        </p:spPr>
-        <p:txBody>
-          <a:bodyPr wrap="square" lIns="0" tIns="0" rIns="0" bIns="0" rtlCol="0" anchor="ctr"/>
-          <a:lstStyle/>
-          <a:p>
-            <a:pPr indent="0" marL="0">
-              <a:buNone/>
-            </a:pPr>
-            <a:r>
-              <a:rPr lang="en-US" sz="1200" b="1" spc="100" kern="0" dirty="0">
-                <a:solidFill>
-                  <a:srgbClr val="B85042"/>
-                </a:solidFill>
-                <a:latin typeface="Calibri" pitchFamily="34" charset="0"/>
-                <a:ea typeface="Calibri" pitchFamily="34" charset="-122"/>
-                <a:cs typeface="Calibri" pitchFamily="34" charset="-120"/>
-              </a:rPr>
-              <a:t>PAID INSTANTLY</a:t>
-            </a:r>
-            <a:endParaRPr lang="en-US" sz="1200" dirty="0"/>
-          </a:p>
-        </p:txBody>
-      </p:sp>
-      <p:sp>
-        <p:nvSpPr>
-          <p:cNvPr id="17" name="Text 15"/>
-          <p:cNvSpPr/>
-          <p:nvPr/>
-        </p:nvSpPr>
-        <p:spPr>
-          <a:xfrm>
-            <a:off x="6355080" y="3200400"/>
-            <a:ext cx="2148840" cy="914400"/>
-          </a:xfrm>
-          <a:prstGeom prst="rect">
-            <a:avLst/>
-          </a:prstGeom>
-          <a:noFill/>
-          <a:ln/>
-        </p:spPr>
-        <p:txBody>
-          <a:bodyPr wrap="square" lIns="0" tIns="0" rIns="0" bIns="0" rtlCol="0" anchor="ctr"/>
-          <a:lstStyle/>
-          <a:p>
-            <a:pPr indent="0" marL="0">
-              <a:lnSpc>
-                <a:spcPct val="105000"/>
-              </a:lnSpc>
-              <a:buNone/>
-            </a:pPr>
-            <a:r>
-              <a:rPr lang="en-US" sz="1150" dirty="0">
-                <a:solidFill>
-                  <a:srgbClr val="2D1B1A"/>
-                </a:solidFill>
-                <a:latin typeface="Calibri" pitchFamily="34" charset="0"/>
-                <a:ea typeface="Calibri" pitchFamily="34" charset="-122"/>
-                <a:cs typeface="Calibri" pitchFamily="34" charset="-120"/>
-              </a:rPr>
-              <a:t>Wins settle on Paynow; sellers paid to a Paynow ID. No bank details to hold, no custody risk on you.</a:t>
-            </a:r>
-            <a:endParaRPr lang="en-US" sz="1150" dirty="0"/>
-          </a:p>
-        </p:txBody>
-      </p:sp>
-      <p:sp>
-        <p:nvSpPr>
-          <p:cNvPr id="18" name="Text 16"/>
-          <p:cNvSpPr/>
-          <p:nvPr/>
-        </p:nvSpPr>
-        <p:spPr>
-          <a:xfrm>
-            <a:off x="457200" y="4846320"/>
-            <a:ext cx="7315200" cy="201168"/>
-          </a:xfrm>
-          <a:prstGeom prst="rect">
-            <a:avLst/>
-          </a:prstGeom>
-          <a:noFill/>
-          <a:ln/>
-        </p:spPr>
-        <p:txBody>
-          <a:bodyPr wrap="square" rtlCol="0" anchor="ctr"/>
-          <a:lstStyle/>
-          <a:p>
-            <a:pPr indent="0" marL="0">
-              <a:buNone/>
-            </a:pPr>
-            <a:r>
-              <a:rPr lang="en-US" sz="800" spc="300" kern="0" dirty="0">
-                <a:solidFill>
-                  <a:srgbClr val="7A4F47"/>
-                </a:solidFill>
-                <a:latin typeface="Calibri" pitchFamily="34" charset="0"/>
-                <a:ea typeface="Calibri" pitchFamily="34" charset="-122"/>
-                <a:cs typeface="Calibri" pitchFamily="34" charset="-120"/>
-              </a:rPr>
-              <a:t>MIMOO  ·  FOR ZIMBABWE'S AUCTION HOUSES  ·  2026</a:t>
-            </a:r>
-            <a:endParaRPr lang="en-US" sz="800" dirty="0"/>
-          </a:p>
-        </p:txBody>
-      </p:sp>
-      <p:sp>
-        <p:nvSpPr>
-          <p:cNvPr id="19" name="Text 17"/>
-          <p:cNvSpPr/>
-          <p:nvPr/>
-        </p:nvSpPr>
-        <p:spPr>
-          <a:xfrm>
-            <a:off x="8229600" y="4846320"/>
-            <a:ext cx="548640" cy="201168"/>
-          </a:xfrm>
-          <a:prstGeom prst="rect">
-            <a:avLst/>
-          </a:prstGeom>
-          <a:noFill/>
-          <a:ln/>
-        </p:spPr>
-        <p:txBody>
-          <a:bodyPr wrap="square" rtlCol="0" anchor="ctr"/>
-          <a:lstStyle/>
-          <a:p>
-            <a:pPr algn="r" indent="0" marL="0">
-              <a:buNone/>
-            </a:pPr>
-            <a:r>
-              <a:rPr lang="en-US" sz="800" dirty="0">
-                <a:solidFill>
-                  <a:srgbClr val="7A4F47"/>
-                </a:solidFill>
-                <a:latin typeface="Calibri" pitchFamily="34" charset="0"/>
-                <a:ea typeface="Calibri" pitchFamily="34" charset="-122"/>
-                <a:cs typeface="Calibri" pitchFamily="34" charset="-120"/>
-              </a:rPr>
-              <a:t>4 / 6</a:t>
+              <a:t>4 / 8</a:t>
             </a:r>
             <a:endParaRPr lang="en-US" sz="800" dirty="0"/>
           </a:p>
@@ -3619,7 +2882,7 @@
         </p:nvSpPr>
         <p:spPr>
           <a:xfrm>
-            <a:off x="640080" y="457200"/>
+            <a:off x="640080" y="475488"/>
             <a:ext cx="7772400" cy="274320"/>
           </a:xfrm>
           <a:prstGeom prst="rect">
@@ -3644,7 +2907,7 @@
                 <a:ea typeface="Calibri" pitchFamily="34" charset="-122"/>
                 <a:cs typeface="Calibri" pitchFamily="34" charset="-120"/>
               </a:rPr>
-              <a:t>HOW IT WORKS</a:t>
+              <a:t>TODAY   vs.   WITH MIMOO</a:t>
             </a:r>
             <a:endParaRPr lang="en-US" sz="1100" dirty="0"/>
           </a:p>
@@ -3673,7 +2936,7 @@
           <a:p>
             <a:pPr indent="0" marL="0">
               <a:lnSpc>
-                <a:spcPct val="100000"/>
+                <a:spcPct val="102000"/>
               </a:lnSpc>
               <a:buNone/>
             </a:pPr>
@@ -3686,7 +2949,7 @@
                 <a:ea typeface="Georgia" pitchFamily="34" charset="-122"/>
                 <a:cs typeface="Georgia" pitchFamily="34" charset="-120"/>
               </a:rPr>
-              <a:t>Live in one sale day. Trusted from the first.</a:t>
+              <a:t>Same auction. Bigger room.</a:t>
             </a:r>
             <a:endParaRPr lang="en-US" sz="2600" dirty="0"/>
           </a:p>
@@ -3694,14 +2957,34 @@
       </p:sp>
       <p:sp>
         <p:nvSpPr>
-          <p:cNvPr id="5" name="Text 3"/>
-          <p:cNvSpPr/>
-          <p:nvPr/>
-        </p:nvSpPr>
-        <p:spPr>
-          <a:xfrm>
-            <a:off x="640080" y="1737360"/>
-            <a:ext cx="7863840" cy="502920"/>
+          <p:cNvPr id="5" name="Shape 3"/>
+          <p:cNvSpPr/>
+          <p:nvPr/>
+        </p:nvSpPr>
+        <p:spPr>
+          <a:xfrm>
+            <a:off x="640080" y="1783080"/>
+            <a:ext cx="3703320" cy="2788920"/>
+          </a:xfrm>
+          <a:prstGeom prst="rect">
+            <a:avLst/>
+          </a:prstGeom>
+          <a:solidFill>
+            <a:srgbClr val="E7D7C1"/>
+          </a:solidFill>
+          <a:ln/>
+        </p:spPr>
+      </p:sp>
+      <p:sp>
+        <p:nvSpPr>
+          <p:cNvPr id="6" name="Text 4"/>
+          <p:cNvSpPr/>
+          <p:nvPr/>
+        </p:nvSpPr>
+        <p:spPr>
+          <a:xfrm>
+            <a:off x="868680" y="1965960"/>
+            <a:ext cx="3291840" cy="320040"/>
           </a:xfrm>
           <a:prstGeom prst="rect">
             <a:avLst/>
@@ -3714,13 +2997,10 @@
           <a:lstStyle/>
           <a:p>
             <a:pPr indent="0" marL="0">
-              <a:lnSpc>
-                <a:spcPct val="100000"/>
-              </a:lnSpc>
-              <a:buNone/>
-            </a:pPr>
-            <a:r>
-              <a:rPr lang="en-US" sz="1300" dirty="0">
+              <a:buNone/>
+            </a:pPr>
+            <a:r>
+              <a:rPr lang="en-US" sz="1300" b="1" spc="300" kern="0" dirty="0">
                 <a:solidFill>
                   <a:srgbClr val="7A4F47"/>
                 </a:solidFill>
@@ -3728,7 +3008,7 @@
                 <a:ea typeface="Calibri" pitchFamily="34" charset="-122"/>
                 <a:cs typeface="Calibri" pitchFamily="34" charset="-120"/>
               </a:rPr>
-              <a:t>A self-serve wizard sets you up in minutes. Then the platform does the work across every channel your buyers already use.</a:t>
+              <a:t>TODAY</a:t>
             </a:r>
             <a:endParaRPr lang="en-US" sz="1300" dirty="0"/>
           </a:p>
@@ -3736,34 +3016,14 @@
       </p:sp>
       <p:sp>
         <p:nvSpPr>
-          <p:cNvPr id="6" name="Shape 4"/>
-          <p:cNvSpPr/>
-          <p:nvPr/>
-        </p:nvSpPr>
-        <p:spPr>
-          <a:xfrm>
-            <a:off x="640080" y="2377440"/>
-            <a:ext cx="502920" cy="502920"/>
-          </a:xfrm>
-          <a:prstGeom prst="ellipse">
-            <a:avLst/>
-          </a:prstGeom>
-          <a:solidFill>
-            <a:srgbClr val="B85042"/>
-          </a:solidFill>
-          <a:ln/>
-        </p:spPr>
-      </p:sp>
-      <p:sp>
-        <p:nvSpPr>
           <p:cNvPr id="7" name="Text 5"/>
           <p:cNvSpPr/>
           <p:nvPr/>
         </p:nvSpPr>
         <p:spPr>
           <a:xfrm>
-            <a:off x="640080" y="2377440"/>
-            <a:ext cx="502920" cy="502920"/>
+            <a:off x="868680" y="2377440"/>
+            <a:ext cx="3291840" cy="2011680"/>
           </a:xfrm>
           <a:prstGeom prst="rect">
             <a:avLst/>
@@ -3775,92 +3035,18 @@
           <a:bodyPr wrap="square" lIns="0" tIns="0" rIns="0" bIns="0" rtlCol="0" anchor="ctr"/>
           <a:lstStyle/>
           <a:p>
-            <a:pPr algn="ctr" indent="0" marL="0">
-              <a:buNone/>
-            </a:pPr>
-            <a:r>
-              <a:rPr lang="en-US" sz="2200" b="1" dirty="0">
-                <a:solidFill>
-                  <a:srgbClr val="F5E6D3"/>
-                </a:solidFill>
-                <a:latin typeface="Georgia" pitchFamily="34" charset="0"/>
-                <a:ea typeface="Georgia" pitchFamily="34" charset="-122"/>
-                <a:cs typeface="Georgia" pitchFamily="34" charset="-120"/>
-              </a:rPr>
-              <a:t>1</a:t>
-            </a:r>
-            <a:endParaRPr lang="en-US" sz="2200" dirty="0"/>
-          </a:p>
-        </p:txBody>
-      </p:sp>
-      <p:sp>
-        <p:nvSpPr>
-          <p:cNvPr id="8" name="Text 6"/>
-          <p:cNvSpPr/>
-          <p:nvPr/>
-        </p:nvSpPr>
-        <p:spPr>
-          <a:xfrm>
-            <a:off x="1280160" y="2404872"/>
-            <a:ext cx="1965960" cy="457200"/>
-          </a:xfrm>
-          <a:prstGeom prst="rect">
-            <a:avLst/>
-          </a:prstGeom>
-          <a:noFill/>
-          <a:ln/>
-        </p:spPr>
-        <p:txBody>
-          <a:bodyPr wrap="square" lIns="0" tIns="0" rIns="0" bIns="0" rtlCol="0" anchor="ctr"/>
-          <a:lstStyle/>
-          <a:p>
-            <a:pPr indent="0" marL="0">
-              <a:buNone/>
-            </a:pPr>
-            <a:r>
-              <a:rPr lang="en-US" sz="1800" b="1" dirty="0">
-                <a:solidFill>
-                  <a:srgbClr val="2D1B1A"/>
-                </a:solidFill>
-                <a:latin typeface="Georgia" pitchFamily="34" charset="0"/>
-                <a:ea typeface="Georgia" pitchFamily="34" charset="-122"/>
-                <a:cs typeface="Georgia" pitchFamily="34" charset="-120"/>
-              </a:rPr>
-              <a:t>List</a:t>
-            </a:r>
-            <a:endParaRPr lang="en-US" sz="1800" dirty="0"/>
-          </a:p>
-        </p:txBody>
-      </p:sp>
-      <p:sp>
-        <p:nvSpPr>
-          <p:cNvPr id="9" name="Text 7"/>
-          <p:cNvSpPr/>
-          <p:nvPr/>
-        </p:nvSpPr>
-        <p:spPr>
-          <a:xfrm>
-            <a:off x="640080" y="3063240"/>
-            <a:ext cx="2468880" cy="1005840"/>
-          </a:xfrm>
-          <a:prstGeom prst="rect">
-            <a:avLst/>
-          </a:prstGeom>
-          <a:noFill/>
-          <a:ln/>
-        </p:spPr>
-        <p:txBody>
-          <a:bodyPr wrap="square" lIns="0" tIns="0" rIns="0" bIns="0" rtlCol="0" anchor="ctr"/>
-          <a:lstStyle/>
-          <a:p>
-            <a:pPr indent="0" marL="0">
+            <a:pPr marL="203200" indent="-203200">
               <a:lnSpc>
-                <a:spcPct val="105000"/>
+                <a:spcPct val="135000"/>
               </a:lnSpc>
-              <a:buNone/>
-            </a:pPr>
-            <a:r>
-              <a:rPr lang="en-US" sz="1200" dirty="0">
+              <a:spcAft>
+                <a:spcPts val="600"/>
+              </a:spcAft>
+              <a:buSzPct val="100000"/>
+              <a:buChar char="—"/>
+            </a:pPr>
+            <a:r>
+              <a:rPr lang="en-US" sz="1400" dirty="0">
                 <a:solidFill>
                   <a:srgbClr val="7A4F47"/>
                 </a:solidFill>
@@ -3868,139 +3054,23 @@
                 <a:ea typeface="Calibri" pitchFamily="34" charset="-122"/>
                 <a:cs typeface="Calibri" pitchFamily="34" charset="-120"/>
               </a:rPr>
-              <a:t>Your sale catalogue goes digital. The onboarding wizard provisions your branded floor — no engineering, no SQL.</a:t>
-            </a:r>
-            <a:endParaRPr lang="en-US" sz="1200" dirty="0"/>
-          </a:p>
-        </p:txBody>
-      </p:sp>
-      <p:sp>
-        <p:nvSpPr>
-          <p:cNvPr id="10" name="Shape 8"/>
-          <p:cNvSpPr/>
-          <p:nvPr/>
-        </p:nvSpPr>
-        <p:spPr>
-          <a:xfrm>
-            <a:off x="3383280" y="2377440"/>
-            <a:ext cx="502920" cy="502920"/>
-          </a:xfrm>
-          <a:prstGeom prst="ellipse">
-            <a:avLst/>
-          </a:prstGeom>
-          <a:solidFill>
-            <a:srgbClr val="B85042"/>
-          </a:solidFill>
-          <a:ln/>
-        </p:spPr>
-      </p:sp>
-      <p:sp>
-        <p:nvSpPr>
-          <p:cNvPr id="11" name="Text 9"/>
-          <p:cNvSpPr/>
-          <p:nvPr/>
-        </p:nvSpPr>
-        <p:spPr>
-          <a:xfrm>
-            <a:off x="3383280" y="2377440"/>
-            <a:ext cx="502920" cy="502920"/>
-          </a:xfrm>
-          <a:prstGeom prst="rect">
-            <a:avLst/>
-          </a:prstGeom>
-          <a:noFill/>
-          <a:ln/>
-        </p:spPr>
-        <p:txBody>
-          <a:bodyPr wrap="square" lIns="0" tIns="0" rIns="0" bIns="0" rtlCol="0" anchor="ctr"/>
-          <a:lstStyle/>
-          <a:p>
-            <a:pPr algn="ctr" indent="0" marL="0">
-              <a:buNone/>
-            </a:pPr>
-            <a:r>
-              <a:rPr lang="en-US" sz="2200" b="1" dirty="0">
-                <a:solidFill>
-                  <a:srgbClr val="F5E6D3"/>
-                </a:solidFill>
-                <a:latin typeface="Georgia" pitchFamily="34" charset="0"/>
-                <a:ea typeface="Georgia" pitchFamily="34" charset="-122"/>
-                <a:cs typeface="Georgia" pitchFamily="34" charset="-120"/>
-              </a:rPr>
-              <a:t>2</a:t>
-            </a:r>
-            <a:endParaRPr lang="en-US" sz="2200" dirty="0"/>
-          </a:p>
-        </p:txBody>
-      </p:sp>
-      <p:sp>
-        <p:nvSpPr>
-          <p:cNvPr id="12" name="Text 10"/>
-          <p:cNvSpPr/>
-          <p:nvPr/>
-        </p:nvSpPr>
-        <p:spPr>
-          <a:xfrm>
-            <a:off x="4023360" y="2404872"/>
-            <a:ext cx="1965960" cy="457200"/>
-          </a:xfrm>
-          <a:prstGeom prst="rect">
-            <a:avLst/>
-          </a:prstGeom>
-          <a:noFill/>
-          <a:ln/>
-        </p:spPr>
-        <p:txBody>
-          <a:bodyPr wrap="square" lIns="0" tIns="0" rIns="0" bIns="0" rtlCol="0" anchor="ctr"/>
-          <a:lstStyle/>
-          <a:p>
-            <a:pPr indent="0" marL="0">
-              <a:buNone/>
-            </a:pPr>
-            <a:r>
-              <a:rPr lang="en-US" sz="1800" b="1" dirty="0">
-                <a:solidFill>
-                  <a:srgbClr val="2D1B1A"/>
-                </a:solidFill>
-                <a:latin typeface="Georgia" pitchFamily="34" charset="0"/>
-                <a:ea typeface="Georgia" pitchFamily="34" charset="-122"/>
-                <a:cs typeface="Georgia" pitchFamily="34" charset="-120"/>
-              </a:rPr>
-              <a:t>Reach</a:t>
-            </a:r>
-            <a:endParaRPr lang="en-US" sz="1800" dirty="0"/>
-          </a:p>
-        </p:txBody>
-      </p:sp>
-      <p:sp>
-        <p:nvSpPr>
-          <p:cNvPr id="13" name="Text 11"/>
-          <p:cNvSpPr/>
-          <p:nvPr/>
-        </p:nvSpPr>
-        <p:spPr>
-          <a:xfrm>
-            <a:off x="3383280" y="3063240"/>
-            <a:ext cx="2468880" cy="1005840"/>
-          </a:xfrm>
-          <a:prstGeom prst="rect">
-            <a:avLst/>
-          </a:prstGeom>
-          <a:noFill/>
-          <a:ln/>
-        </p:spPr>
-        <p:txBody>
-          <a:bodyPr wrap="square" lIns="0" tIns="0" rIns="0" bIns="0" rtlCol="0" anchor="ctr"/>
-          <a:lstStyle/>
-          <a:p>
-            <a:pPr indent="0" marL="0">
+              <a:t>Only the buyers in the pen</a:t>
+            </a:r>
+            <a:endParaRPr lang="en-US" sz="1400" dirty="0"/>
+          </a:p>
+          <a:p>
+            <a:pPr marL="203200" indent="-203200">
               <a:lnSpc>
-                <a:spcPct val="105000"/>
+                <a:spcPct val="135000"/>
               </a:lnSpc>
-              <a:buNone/>
-            </a:pPr>
-            <a:r>
-              <a:rPr lang="en-US" sz="1200" dirty="0">
+              <a:spcAft>
+                <a:spcPts val="600"/>
+              </a:spcAft>
+              <a:buSzPct val="100000"/>
+              <a:buChar char="—"/>
+            </a:pPr>
+            <a:r>
+              <a:rPr lang="en-US" sz="1400" dirty="0">
                 <a:solidFill>
                   <a:srgbClr val="7A4F47"/>
                 </a:solidFill>
@@ -4008,139 +3078,23 @@
                 <a:ea typeface="Calibri" pitchFamily="34" charset="-122"/>
                 <a:cs typeface="Calibri" pitchFamily="34" charset="-120"/>
               </a:rPr>
-              <a:t>Buyers bid across five channels — web, WhatsApp, USSD, BillPay, Messenger — on any phone, anywhere.</a:t>
-            </a:r>
-            <a:endParaRPr lang="en-US" sz="1200" dirty="0"/>
-          </a:p>
-        </p:txBody>
-      </p:sp>
-      <p:sp>
-        <p:nvSpPr>
-          <p:cNvPr id="14" name="Shape 12"/>
-          <p:cNvSpPr/>
-          <p:nvPr/>
-        </p:nvSpPr>
-        <p:spPr>
-          <a:xfrm>
-            <a:off x="6126480" y="2377440"/>
-            <a:ext cx="502920" cy="502920"/>
-          </a:xfrm>
-          <a:prstGeom prst="ellipse">
-            <a:avLst/>
-          </a:prstGeom>
-          <a:solidFill>
-            <a:srgbClr val="B85042"/>
-          </a:solidFill>
-          <a:ln/>
-        </p:spPr>
-      </p:sp>
-      <p:sp>
-        <p:nvSpPr>
-          <p:cNvPr id="15" name="Text 13"/>
-          <p:cNvSpPr/>
-          <p:nvPr/>
-        </p:nvSpPr>
-        <p:spPr>
-          <a:xfrm>
-            <a:off x="6126480" y="2377440"/>
-            <a:ext cx="502920" cy="502920"/>
-          </a:xfrm>
-          <a:prstGeom prst="rect">
-            <a:avLst/>
-          </a:prstGeom>
-          <a:noFill/>
-          <a:ln/>
-        </p:spPr>
-        <p:txBody>
-          <a:bodyPr wrap="square" lIns="0" tIns="0" rIns="0" bIns="0" rtlCol="0" anchor="ctr"/>
-          <a:lstStyle/>
-          <a:p>
-            <a:pPr algn="ctr" indent="0" marL="0">
-              <a:buNone/>
-            </a:pPr>
-            <a:r>
-              <a:rPr lang="en-US" sz="2200" b="1" dirty="0">
-                <a:solidFill>
-                  <a:srgbClr val="F5E6D3"/>
-                </a:solidFill>
-                <a:latin typeface="Georgia" pitchFamily="34" charset="0"/>
-                <a:ea typeface="Georgia" pitchFamily="34" charset="-122"/>
-                <a:cs typeface="Georgia" pitchFamily="34" charset="-120"/>
-              </a:rPr>
-              <a:t>3</a:t>
-            </a:r>
-            <a:endParaRPr lang="en-US" sz="2200" dirty="0"/>
-          </a:p>
-        </p:txBody>
-      </p:sp>
-      <p:sp>
-        <p:nvSpPr>
-          <p:cNvPr id="16" name="Text 14"/>
-          <p:cNvSpPr/>
-          <p:nvPr/>
-        </p:nvSpPr>
-        <p:spPr>
-          <a:xfrm>
-            <a:off x="6766560" y="2404872"/>
-            <a:ext cx="1965960" cy="457200"/>
-          </a:xfrm>
-          <a:prstGeom prst="rect">
-            <a:avLst/>
-          </a:prstGeom>
-          <a:noFill/>
-          <a:ln/>
-        </p:spPr>
-        <p:txBody>
-          <a:bodyPr wrap="square" lIns="0" tIns="0" rIns="0" bIns="0" rtlCol="0" anchor="ctr"/>
-          <a:lstStyle/>
-          <a:p>
-            <a:pPr indent="0" marL="0">
-              <a:buNone/>
-            </a:pPr>
-            <a:r>
-              <a:rPr lang="en-US" sz="1800" b="1" dirty="0">
-                <a:solidFill>
-                  <a:srgbClr val="2D1B1A"/>
-                </a:solidFill>
-                <a:latin typeface="Georgia" pitchFamily="34" charset="0"/>
-                <a:ea typeface="Georgia" pitchFamily="34" charset="-122"/>
-                <a:cs typeface="Georgia" pitchFamily="34" charset="-120"/>
-              </a:rPr>
-              <a:t>Settle</a:t>
-            </a:r>
-            <a:endParaRPr lang="en-US" sz="1800" dirty="0"/>
-          </a:p>
-        </p:txBody>
-      </p:sp>
-      <p:sp>
-        <p:nvSpPr>
-          <p:cNvPr id="17" name="Text 15"/>
-          <p:cNvSpPr/>
-          <p:nvPr/>
-        </p:nvSpPr>
-        <p:spPr>
-          <a:xfrm>
-            <a:off x="6126480" y="3063240"/>
-            <a:ext cx="2468880" cy="1005840"/>
-          </a:xfrm>
-          <a:prstGeom prst="rect">
-            <a:avLst/>
-          </a:prstGeom>
-          <a:noFill/>
-          <a:ln/>
-        </p:spPr>
-        <p:txBody>
-          <a:bodyPr wrap="square" lIns="0" tIns="0" rIns="0" bIns="0" rtlCol="0" anchor="ctr"/>
-          <a:lstStyle/>
-          <a:p>
-            <a:pPr indent="0" marL="0">
+              <a:t>Cash, IOUs, no-shows</a:t>
+            </a:r>
+            <a:endParaRPr lang="en-US" sz="1400" dirty="0"/>
+          </a:p>
+          <a:p>
+            <a:pPr marL="203200" indent="-203200">
               <a:lnSpc>
-                <a:spcPct val="105000"/>
+                <a:spcPct val="135000"/>
               </a:lnSpc>
-              <a:buNone/>
-            </a:pPr>
-            <a:r>
-              <a:rPr lang="en-US" sz="1200" dirty="0">
+              <a:spcAft>
+                <a:spcPts val="600"/>
+              </a:spcAft>
+              <a:buSzPct val="100000"/>
+              <a:buChar char="—"/>
+            </a:pPr>
+            <a:r>
+              <a:rPr lang="en-US" sz="1400" dirty="0">
                 <a:solidFill>
                   <a:srgbClr val="7A4F47"/>
                 </a:solidFill>
@@ -4148,22 +3102,46 @@
                 <a:ea typeface="Calibri" pitchFamily="34" charset="-122"/>
                 <a:cs typeface="Calibri" pitchFamily="34" charset="-120"/>
               </a:rPr>
-              <a:t>Winning bids clear on Paynow. Sellers are paid; you keep your commission. Cash and no-shows, gone.</a:t>
-            </a:r>
-            <a:endParaRPr lang="en-US" sz="1200" dirty="0"/>
-          </a:p>
-        </p:txBody>
-      </p:sp>
-      <p:sp>
-        <p:nvSpPr>
-          <p:cNvPr id="18" name="Shape 16"/>
-          <p:cNvSpPr/>
-          <p:nvPr/>
-        </p:nvSpPr>
-        <p:spPr>
-          <a:xfrm>
-            <a:off x="640080" y="4187952"/>
-            <a:ext cx="7955280" cy="548640"/>
+              <a:t>Sellers paid days later</a:t>
+            </a:r>
+            <a:endParaRPr lang="en-US" sz="1400" dirty="0"/>
+          </a:p>
+          <a:p>
+            <a:pPr marL="203200" indent="-203200">
+              <a:lnSpc>
+                <a:spcPct val="135000"/>
+              </a:lnSpc>
+              <a:spcAft>
+                <a:spcPts val="600"/>
+              </a:spcAft>
+              <a:buSzPct val="100000"/>
+              <a:buChar char="—"/>
+            </a:pPr>
+            <a:r>
+              <a:rPr lang="en-US" sz="1400" dirty="0">
+                <a:solidFill>
+                  <a:srgbClr val="7A4F47"/>
+                </a:solidFill>
+                <a:latin typeface="Calibri" pitchFamily="34" charset="0"/>
+                <a:ea typeface="Calibri" pitchFamily="34" charset="-122"/>
+                <a:cs typeface="Calibri" pitchFamily="34" charset="-120"/>
+              </a:rPr>
+              <a:t>Buyers you'll never reach</a:t>
+            </a:r>
+            <a:endParaRPr lang="en-US" sz="1400" dirty="0"/>
+          </a:p>
+        </p:txBody>
+      </p:sp>
+      <p:sp>
+        <p:nvSpPr>
+          <p:cNvPr id="8" name="Shape 6"/>
+          <p:cNvSpPr/>
+          <p:nvPr/>
+        </p:nvSpPr>
+        <p:spPr>
+          <a:xfrm>
+            <a:off x="4572000" y="1783080"/>
+            <a:ext cx="4023360" cy="2788920"/>
           </a:xfrm>
           <a:prstGeom prst="rect">
             <a:avLst/>
@@ -4176,14 +3154,34 @@
       </p:sp>
       <p:sp>
         <p:nvSpPr>
-          <p:cNvPr id="19" name="Text 17"/>
-          <p:cNvSpPr/>
-          <p:nvPr/>
-        </p:nvSpPr>
-        <p:spPr>
-          <a:xfrm>
-            <a:off x="868680" y="4187952"/>
-            <a:ext cx="7498080" cy="548640"/>
+          <p:cNvPr id="9" name="Shape 7"/>
+          <p:cNvSpPr/>
+          <p:nvPr/>
+        </p:nvSpPr>
+        <p:spPr>
+          <a:xfrm>
+            <a:off x="4572000" y="1783080"/>
+            <a:ext cx="82296" cy="2788920"/>
+          </a:xfrm>
+          <a:prstGeom prst="rect">
+            <a:avLst/>
+          </a:prstGeom>
+          <a:solidFill>
+            <a:srgbClr val="D4A843"/>
+          </a:solidFill>
+          <a:ln/>
+        </p:spPr>
+      </p:sp>
+      <p:sp>
+        <p:nvSpPr>
+          <p:cNvPr id="10" name="Text 8"/>
+          <p:cNvSpPr/>
+          <p:nvPr/>
+        </p:nvSpPr>
+        <p:spPr>
+          <a:xfrm>
+            <a:off x="4846320" y="1965960"/>
+            <a:ext cx="3566160" cy="320040"/>
           </a:xfrm>
           <a:prstGeom prst="rect">
             <a:avLst/>
@@ -4199,7 +3197,7 @@
               <a:buNone/>
             </a:pPr>
             <a:r>
-              <a:rPr lang="en-US" sz="1150" b="1" spc="200" kern="0" dirty="0">
+              <a:rPr lang="en-US" sz="1300" b="1" spc="300" kern="0" dirty="0">
                 <a:solidFill>
                   <a:srgbClr val="D4A843"/>
                 </a:solidFill>
@@ -4207,13 +3205,45 @@
                 <a:ea typeface="Calibri" pitchFamily="34" charset="-122"/>
                 <a:cs typeface="Calibri" pitchFamily="34" charset="-120"/>
               </a:rPr>
-              <a:t>BUILT-IN TRUST    </a:t>
-            </a:r>
-            <a:pPr indent="0" marL="0">
-              <a:buNone/>
-            </a:pPr>
-            <a:r>
-              <a:rPr lang="en-US" sz="1150" dirty="0">
+              <a:t>WITH MIMOO</a:t>
+            </a:r>
+            <a:endParaRPr lang="en-US" sz="1300" dirty="0"/>
+          </a:p>
+        </p:txBody>
+      </p:sp>
+      <p:sp>
+        <p:nvSpPr>
+          <p:cNvPr id="11" name="Text 9"/>
+          <p:cNvSpPr/>
+          <p:nvPr/>
+        </p:nvSpPr>
+        <p:spPr>
+          <a:xfrm>
+            <a:off x="4846320" y="2377440"/>
+            <a:ext cx="3520440" cy="2011680"/>
+          </a:xfrm>
+          <a:prstGeom prst="rect">
+            <a:avLst/>
+          </a:prstGeom>
+          <a:noFill/>
+          <a:ln/>
+        </p:spPr>
+        <p:txBody>
+          <a:bodyPr wrap="square" lIns="0" tIns="0" rIns="0" bIns="0" rtlCol="0" anchor="ctr"/>
+          <a:lstStyle/>
+          <a:p>
+            <a:pPr marL="228600" indent="-228600">
+              <a:lnSpc>
+                <a:spcPct val="130000"/>
+              </a:lnSpc>
+              <a:spcAft>
+                <a:spcPts val="600"/>
+              </a:spcAft>
+              <a:buSzPct val="100000"/>
+              <a:buChar char="✓"/>
+            </a:pPr>
+            <a:r>
+              <a:rPr lang="en-US" sz="1400" dirty="0">
                 <a:solidFill>
                   <a:srgbClr val="F5E6D3"/>
                 </a:solidFill>
@@ -4221,85 +3251,157 @@
                 <a:ea typeface="Calibri" pitchFamily="34" charset="-122"/>
                 <a:cs typeface="Calibri" pitchFamily="34" charset="-120"/>
               </a:rPr>
-              <a:t>Digital police clearance   ·   Escrow until delivery   ·   Paynow-ID payouts</a:t>
-            </a:r>
-            <a:endParaRPr lang="en-US" sz="1150" dirty="0"/>
-          </a:p>
-        </p:txBody>
-      </p:sp>
-      <p:sp>
-        <p:nvSpPr>
-          <p:cNvPr id="20" name="Text 18"/>
-          <p:cNvSpPr/>
-          <p:nvPr/>
-        </p:nvSpPr>
-        <p:spPr>
-          <a:xfrm>
-            <a:off x="457200" y="4846320"/>
-            <a:ext cx="7315200" cy="201168"/>
-          </a:xfrm>
-          <a:prstGeom prst="rect">
-            <a:avLst/>
-          </a:prstGeom>
-          <a:noFill/>
-          <a:ln/>
-        </p:spPr>
-        <p:txBody>
-          <a:bodyPr wrap="square" rtlCol="0" anchor="ctr"/>
-          <a:lstStyle/>
-          <a:p>
-            <a:pPr indent="0" marL="0">
-              <a:buNone/>
-            </a:pPr>
-            <a:r>
-              <a:rPr lang="en-US" sz="800" spc="300" kern="0" dirty="0">
-                <a:solidFill>
-                  <a:srgbClr val="7A4F47"/>
+              <a:t>Bidders on five channels — web, WhatsApp, USSD, any phone</a:t>
+            </a:r>
+            <a:endParaRPr lang="en-US" sz="1400" dirty="0"/>
+          </a:p>
+          <a:p>
+            <a:pPr marL="228600" indent="-228600">
+              <a:lnSpc>
+                <a:spcPct val="130000"/>
+              </a:lnSpc>
+              <a:spcAft>
+                <a:spcPts val="600"/>
+              </a:spcAft>
+              <a:buSzPct val="100000"/>
+              <a:buChar char="✓"/>
+            </a:pPr>
+            <a:r>
+              <a:rPr lang="en-US" sz="1400" dirty="0">
+                <a:solidFill>
+                  <a:srgbClr val="F5E6D3"/>
                 </a:solidFill>
                 <a:latin typeface="Calibri" pitchFamily="34" charset="0"/>
                 <a:ea typeface="Calibri" pitchFamily="34" charset="-122"/>
                 <a:cs typeface="Calibri" pitchFamily="34" charset="-120"/>
               </a:rPr>
-              <a:t>MIMOO  ·  FOR ZIMBABWE'S AUCTION HOUSES  ·  2026</a:t>
-            </a:r>
-            <a:endParaRPr lang="en-US" sz="800" dirty="0"/>
-          </a:p>
-        </p:txBody>
-      </p:sp>
-      <p:sp>
-        <p:nvSpPr>
-          <p:cNvPr id="21" name="Text 19"/>
-          <p:cNvSpPr/>
-          <p:nvPr/>
-        </p:nvSpPr>
-        <p:spPr>
-          <a:xfrm>
-            <a:off x="8229600" y="4846320"/>
-            <a:ext cx="548640" cy="201168"/>
-          </a:xfrm>
-          <a:prstGeom prst="rect">
-            <a:avLst/>
-          </a:prstGeom>
-          <a:noFill/>
-          <a:ln/>
-        </p:spPr>
-        <p:txBody>
-          <a:bodyPr wrap="square" rtlCol="0" anchor="ctr"/>
-          <a:lstStyle/>
-          <a:p>
-            <a:pPr algn="r" indent="0" marL="0">
-              <a:buNone/>
-            </a:pPr>
-            <a:r>
-              <a:rPr lang="en-US" sz="800" dirty="0">
-                <a:solidFill>
-                  <a:srgbClr val="7A4F47"/>
+              <a:t>Settled on Paynow before the truck leaves</a:t>
+            </a:r>
+            <a:endParaRPr lang="en-US" sz="1400" dirty="0"/>
+          </a:p>
+          <a:p>
+            <a:pPr marL="228600" indent="-228600">
+              <a:lnSpc>
+                <a:spcPct val="130000"/>
+              </a:lnSpc>
+              <a:spcAft>
+                <a:spcPts val="600"/>
+              </a:spcAft>
+              <a:buSzPct val="100000"/>
+              <a:buChar char="✓"/>
+            </a:pPr>
+            <a:r>
+              <a:rPr lang="en-US" sz="1400" dirty="0">
+                <a:solidFill>
+                  <a:srgbClr val="F5E6D3"/>
                 </a:solidFill>
                 <a:latin typeface="Calibri" pitchFamily="34" charset="0"/>
                 <a:ea typeface="Calibri" pitchFamily="34" charset="-122"/>
                 <a:cs typeface="Calibri" pitchFamily="34" charset="-120"/>
               </a:rPr>
-              <a:t>5 / 6</a:t>
+              <a:t>Remote &amp; diaspora buyers in the room</a:t>
+            </a:r>
+            <a:endParaRPr lang="en-US" sz="1400" dirty="0"/>
+          </a:p>
+          <a:p>
+            <a:pPr marL="228600" indent="-228600">
+              <a:lnSpc>
+                <a:spcPct val="130000"/>
+              </a:lnSpc>
+              <a:spcAft>
+                <a:spcPts val="600"/>
+              </a:spcAft>
+              <a:buSzPct val="100000"/>
+              <a:buChar char="✓"/>
+            </a:pPr>
+            <a:r>
+              <a:rPr lang="en-US" sz="1400" dirty="0">
+                <a:solidFill>
+                  <a:srgbClr val="F5E6D3"/>
+                </a:solidFill>
+                <a:latin typeface="Calibri" pitchFamily="34" charset="0"/>
+                <a:ea typeface="Calibri" pitchFamily="34" charset="-122"/>
+                <a:cs typeface="Calibri" pitchFamily="34" charset="-120"/>
+              </a:rPr>
+              <a:t>Verified buyers, escrow, digital clearance</a:t>
+            </a:r>
+            <a:endParaRPr lang="en-US" sz="1400" dirty="0"/>
+          </a:p>
+        </p:txBody>
+      </p:sp>
+      <p:sp>
+        <p:nvSpPr>
+          <p:cNvPr id="12" name="Text 10"/>
+          <p:cNvSpPr/>
+          <p:nvPr/>
+        </p:nvSpPr>
+        <p:spPr>
+          <a:xfrm>
+            <a:off x="457200" y="4846320"/>
+            <a:ext cx="7315200" cy="201168"/>
+          </a:xfrm>
+          <a:prstGeom prst="rect">
+            <a:avLst/>
+          </a:prstGeom>
+          <a:noFill/>
+          <a:ln/>
+        </p:spPr>
+        <p:txBody>
+          <a:bodyPr wrap="square" rtlCol="0" anchor="ctr"/>
+          <a:lstStyle/>
+          <a:p>
+            <a:pPr indent="0" marL="0">
+              <a:buNone/>
+            </a:pPr>
+            <a:r>
+              <a:rPr lang="en-US" sz="800" spc="300" kern="0" dirty="0">
+                <a:solidFill>
+                  <a:srgbClr val="7A4F47"/>
+                </a:solidFill>
+                <a:latin typeface="Calibri" pitchFamily="34" charset="0"/>
+                <a:ea typeface="Calibri" pitchFamily="34" charset="-122"/>
+                <a:cs typeface="Calibri" pitchFamily="34" charset="-120"/>
+              </a:rPr>
+              <a:t>MIMOO  ·  FOR ZIMBABWE'S AUCTION HOUSES</a:t>
+            </a:r>
+            <a:endParaRPr lang="en-US" sz="800" dirty="0"/>
+          </a:p>
+        </p:txBody>
+      </p:sp>
+      <p:sp>
+        <p:nvSpPr>
+          <p:cNvPr id="13" name="Text 11"/>
+          <p:cNvSpPr/>
+          <p:nvPr/>
+        </p:nvSpPr>
+        <p:spPr>
+          <a:xfrm>
+            <a:off x="8229600" y="4846320"/>
+            <a:ext cx="548640" cy="201168"/>
+          </a:xfrm>
+          <a:prstGeom prst="rect">
+            <a:avLst/>
+          </a:prstGeom>
+          <a:noFill/>
+          <a:ln/>
+        </p:spPr>
+        <p:txBody>
+          <a:bodyPr wrap="square" rtlCol="0" anchor="ctr"/>
+          <a:lstStyle/>
+          <a:p>
+            <a:pPr algn="r" indent="0" marL="0">
+              <a:buNone/>
+            </a:pPr>
+            <a:r>
+              <a:rPr lang="en-US" sz="800" dirty="0">
+                <a:solidFill>
+                  <a:srgbClr val="7A4F47"/>
+                </a:solidFill>
+                <a:latin typeface="Calibri" pitchFamily="34" charset="0"/>
+                <a:ea typeface="Calibri" pitchFamily="34" charset="-122"/>
+                <a:cs typeface="Calibri" pitchFamily="34" charset="-120"/>
+              </a:rPr>
+              <a:t>5 / 8</a:t>
             </a:r>
             <a:endParaRPr lang="en-US" sz="800" dirty="0"/>
           </a:p>
@@ -4316,6 +3418,1286 @@
 <file path=ppt/slides/slide6.xml><?xml version="1.0" encoding="utf-8"?>
 <p:sld xmlns:a="http://schemas.openxmlformats.org/drawingml/2006/main" xmlns:r="http://schemas.openxmlformats.org/officeDocument/2006/relationships" xmlns:p="http://schemas.openxmlformats.org/presentationml/2006/main">
   <p:cSld name="Slide 6">
+    <p:bg>
+      <p:bgPr>
+        <a:solidFill>
+          <a:srgbClr val="F5E6D3"/>
+        </a:solidFill>
+      </p:bgPr>
+    </p:bg>
+    <p:spTree>
+      <p:nvGrpSpPr>
+        <p:cNvPr id="1" name=""/>
+        <p:cNvGrpSpPr/>
+        <p:nvPr/>
+      </p:nvGrpSpPr>
+      <p:grpSpPr>
+        <a:xfrm>
+          <a:off x="0" y="0"/>
+          <a:ext cx="0" cy="0"/>
+          <a:chOff x="0" y="0"/>
+          <a:chExt cx="0" cy="0"/>
+        </a:xfrm>
+      </p:grpSpPr>
+      <p:sp>
+        <p:nvSpPr>
+          <p:cNvPr id="2" name="Shape 0"/>
+          <p:cNvSpPr/>
+          <p:nvPr/>
+        </p:nvSpPr>
+        <p:spPr>
+          <a:xfrm>
+            <a:off x="0" y="0"/>
+            <a:ext cx="164592" cy="5143500"/>
+          </a:xfrm>
+          <a:prstGeom prst="rect">
+            <a:avLst/>
+          </a:prstGeom>
+          <a:solidFill>
+            <a:srgbClr val="D4A843"/>
+          </a:solidFill>
+          <a:ln/>
+        </p:spPr>
+      </p:sp>
+      <p:sp>
+        <p:nvSpPr>
+          <p:cNvPr id="3" name="Text 1"/>
+          <p:cNvSpPr/>
+          <p:nvPr/>
+        </p:nvSpPr>
+        <p:spPr>
+          <a:xfrm>
+            <a:off x="640080" y="475488"/>
+            <a:ext cx="7772400" cy="274320"/>
+          </a:xfrm>
+          <a:prstGeom prst="rect">
+            <a:avLst/>
+          </a:prstGeom>
+          <a:noFill/>
+          <a:ln/>
+        </p:spPr>
+        <p:txBody>
+          <a:bodyPr wrap="square" rtlCol="0" anchor="ctr"/>
+          <a:lstStyle/>
+          <a:p>
+            <a:pPr indent="0" marL="0">
+              <a:buNone/>
+            </a:pPr>
+            <a:r>
+              <a:rPr lang="en-US" sz="1100" b="1" spc="400" kern="0" dirty="0">
+                <a:solidFill>
+                  <a:srgbClr val="B85042"/>
+                </a:solidFill>
+                <a:latin typeface="Calibri" pitchFamily="34" charset="0"/>
+                <a:ea typeface="Calibri" pitchFamily="34" charset="-122"/>
+                <a:cs typeface="Calibri" pitchFamily="34" charset="-120"/>
+              </a:rPr>
+              <a:t>WHY YOU CAN TRUST IT</a:t>
+            </a:r>
+            <a:endParaRPr lang="en-US" sz="1100" dirty="0"/>
+          </a:p>
+        </p:txBody>
+      </p:sp>
+      <p:sp>
+        <p:nvSpPr>
+          <p:cNvPr id="4" name="Text 2"/>
+          <p:cNvSpPr/>
+          <p:nvPr/>
+        </p:nvSpPr>
+        <p:spPr>
+          <a:xfrm>
+            <a:off x="640080" y="868680"/>
+            <a:ext cx="7955280" cy="777240"/>
+          </a:xfrm>
+          <a:prstGeom prst="rect">
+            <a:avLst/>
+          </a:prstGeom>
+          <a:noFill/>
+          <a:ln/>
+        </p:spPr>
+        <p:txBody>
+          <a:bodyPr wrap="square" lIns="0" tIns="0" rIns="0" bIns="0" rtlCol="0" anchor="ctr"/>
+          <a:lstStyle/>
+          <a:p>
+            <a:pPr indent="0" marL="0">
+              <a:lnSpc>
+                <a:spcPct val="102000"/>
+              </a:lnSpc>
+              <a:buNone/>
+            </a:pPr>
+            <a:r>
+              <a:rPr lang="en-US" sz="2600" b="1" dirty="0">
+                <a:solidFill>
+                  <a:srgbClr val="2D1B1A"/>
+                </a:solidFill>
+                <a:latin typeface="Georgia" pitchFamily="34" charset="0"/>
+                <a:ea typeface="Georgia" pitchFamily="34" charset="-122"/>
+                <a:cs typeface="Georgia" pitchFamily="34" charset="-120"/>
+              </a:rPr>
+              <a:t>Built on the rails your buyers already trust.</a:t>
+            </a:r>
+            <a:endParaRPr lang="en-US" sz="2600" dirty="0"/>
+          </a:p>
+        </p:txBody>
+      </p:sp>
+      <p:sp>
+        <p:nvSpPr>
+          <p:cNvPr id="5" name="Text 3"/>
+          <p:cNvSpPr/>
+          <p:nvPr/>
+        </p:nvSpPr>
+        <p:spPr>
+          <a:xfrm>
+            <a:off x="640080" y="1737360"/>
+            <a:ext cx="7863840" cy="365760"/>
+          </a:xfrm>
+          <a:prstGeom prst="rect">
+            <a:avLst/>
+          </a:prstGeom>
+          <a:noFill/>
+          <a:ln/>
+        </p:spPr>
+        <p:txBody>
+          <a:bodyPr wrap="square" lIns="0" tIns="0" rIns="0" bIns="0" rtlCol="0" anchor="ctr"/>
+          <a:lstStyle/>
+          <a:p>
+            <a:pPr indent="0" marL="0">
+              <a:buNone/>
+            </a:pPr>
+            <a:r>
+              <a:rPr lang="en-US" sz="1400" b="1" dirty="0">
+                <a:solidFill>
+                  <a:srgbClr val="2D1B1A"/>
+                </a:solidFill>
+                <a:latin typeface="Calibri" pitchFamily="34" charset="0"/>
+                <a:ea typeface="Calibri" pitchFamily="34" charset="-122"/>
+                <a:cs typeface="Calibri" pitchFamily="34" charset="-120"/>
+              </a:rPr>
+              <a:t>You're thinking: </a:t>
+            </a:r>
+            <a:pPr indent="0" marL="0">
+              <a:buNone/>
+            </a:pPr>
+            <a:r>
+              <a:rPr lang="en-US" sz="1400" i="1" dirty="0">
+                <a:solidFill>
+                  <a:srgbClr val="7A4F47"/>
+                </a:solidFill>
+                <a:latin typeface="Calibri" pitchFamily="34" charset="0"/>
+                <a:ea typeface="Calibri" pitchFamily="34" charset="-122"/>
+                <a:cs typeface="Calibri" pitchFamily="34" charset="-120"/>
+              </a:rPr>
+              <a:t>my buyers don't trust apps — and I'm not handing my floor to a stranger.</a:t>
+            </a:r>
+            <a:endParaRPr lang="en-US" sz="1400" dirty="0"/>
+          </a:p>
+        </p:txBody>
+      </p:sp>
+      <p:sp>
+        <p:nvSpPr>
+          <p:cNvPr id="6" name="Shape 4"/>
+          <p:cNvSpPr/>
+          <p:nvPr/>
+        </p:nvSpPr>
+        <p:spPr>
+          <a:xfrm>
+            <a:off x="640080" y="2322576"/>
+            <a:ext cx="182880" cy="182880"/>
+          </a:xfrm>
+          <a:prstGeom prst="ellipse">
+            <a:avLst/>
+          </a:prstGeom>
+          <a:solidFill>
+            <a:srgbClr val="B85042"/>
+          </a:solidFill>
+          <a:ln/>
+        </p:spPr>
+      </p:sp>
+      <p:sp>
+        <p:nvSpPr>
+          <p:cNvPr id="7" name="Text 5"/>
+          <p:cNvSpPr/>
+          <p:nvPr/>
+        </p:nvSpPr>
+        <p:spPr>
+          <a:xfrm>
+            <a:off x="960120" y="2286000"/>
+            <a:ext cx="2926080" cy="640080"/>
+          </a:xfrm>
+          <a:prstGeom prst="rect">
+            <a:avLst/>
+          </a:prstGeom>
+          <a:noFill/>
+          <a:ln/>
+        </p:spPr>
+        <p:txBody>
+          <a:bodyPr wrap="square" lIns="0" tIns="0" rIns="0" bIns="0" rtlCol="0" anchor="t"/>
+          <a:lstStyle/>
+          <a:p>
+            <a:pPr indent="0" marL="0">
+              <a:lnSpc>
+                <a:spcPct val="100000"/>
+              </a:lnSpc>
+              <a:buNone/>
+            </a:pPr>
+            <a:r>
+              <a:rPr lang="en-US" sz="1500" b="1" dirty="0">
+                <a:solidFill>
+                  <a:srgbClr val="2D1B1A"/>
+                </a:solidFill>
+                <a:latin typeface="Georgia" pitchFamily="34" charset="0"/>
+                <a:ea typeface="Georgia" pitchFamily="34" charset="-122"/>
+                <a:cs typeface="Georgia" pitchFamily="34" charset="-120"/>
+              </a:rPr>
+              <a:t>It settles on Paynow</a:t>
+            </a:r>
+            <a:endParaRPr lang="en-US" sz="1500" dirty="0"/>
+          </a:p>
+        </p:txBody>
+      </p:sp>
+      <p:sp>
+        <p:nvSpPr>
+          <p:cNvPr id="8" name="Text 6"/>
+          <p:cNvSpPr/>
+          <p:nvPr/>
+        </p:nvSpPr>
+        <p:spPr>
+          <a:xfrm>
+            <a:off x="3977640" y="2286000"/>
+            <a:ext cx="4526280" cy="713232"/>
+          </a:xfrm>
+          <a:prstGeom prst="rect">
+            <a:avLst/>
+          </a:prstGeom>
+          <a:noFill/>
+          <a:ln/>
+        </p:spPr>
+        <p:txBody>
+          <a:bodyPr wrap="square" lIns="0" tIns="0" rIns="0" bIns="0" rtlCol="0" anchor="t"/>
+          <a:lstStyle/>
+          <a:p>
+            <a:pPr indent="0" marL="0">
+              <a:lnSpc>
+                <a:spcPct val="105000"/>
+              </a:lnSpc>
+              <a:buNone/>
+            </a:pPr>
+            <a:r>
+              <a:rPr lang="en-US" sz="1250" dirty="0">
+                <a:solidFill>
+                  <a:srgbClr val="7A4F47"/>
+                </a:solidFill>
+                <a:latin typeface="Calibri" pitchFamily="34" charset="0"/>
+                <a:ea typeface="Calibri" pitchFamily="34" charset="-122"/>
+                <a:cs typeface="Calibri" pitchFamily="34" charset="-120"/>
+              </a:rPr>
+              <a:t>Every cent clears on Paynow — the name Zimbabwe already pays with. We never hold your money or your buyers' details.</a:t>
+            </a:r>
+            <a:endParaRPr lang="en-US" sz="1250" dirty="0"/>
+          </a:p>
+        </p:txBody>
+      </p:sp>
+      <p:sp>
+        <p:nvSpPr>
+          <p:cNvPr id="9" name="Shape 7"/>
+          <p:cNvSpPr/>
+          <p:nvPr/>
+        </p:nvSpPr>
+        <p:spPr>
+          <a:xfrm>
+            <a:off x="640080" y="3090672"/>
+            <a:ext cx="182880" cy="182880"/>
+          </a:xfrm>
+          <a:prstGeom prst="ellipse">
+            <a:avLst/>
+          </a:prstGeom>
+          <a:solidFill>
+            <a:srgbClr val="B85042"/>
+          </a:solidFill>
+          <a:ln/>
+        </p:spPr>
+      </p:sp>
+      <p:sp>
+        <p:nvSpPr>
+          <p:cNvPr id="10" name="Text 8"/>
+          <p:cNvSpPr/>
+          <p:nvPr/>
+        </p:nvSpPr>
+        <p:spPr>
+          <a:xfrm>
+            <a:off x="960120" y="3054096"/>
+            <a:ext cx="2926080" cy="640080"/>
+          </a:xfrm>
+          <a:prstGeom prst="rect">
+            <a:avLst/>
+          </a:prstGeom>
+          <a:noFill/>
+          <a:ln/>
+        </p:spPr>
+        <p:txBody>
+          <a:bodyPr wrap="square" lIns="0" tIns="0" rIns="0" bIns="0" rtlCol="0" anchor="t"/>
+          <a:lstStyle/>
+          <a:p>
+            <a:pPr indent="0" marL="0">
+              <a:lnSpc>
+                <a:spcPct val="100000"/>
+              </a:lnSpc>
+              <a:buNone/>
+            </a:pPr>
+            <a:r>
+              <a:rPr lang="en-US" sz="1500" b="1" dirty="0">
+                <a:solidFill>
+                  <a:srgbClr val="2D1B1A"/>
+                </a:solidFill>
+                <a:latin typeface="Georgia" pitchFamily="34" charset="0"/>
+                <a:ea typeface="Georgia" pitchFamily="34" charset="-122"/>
+                <a:cs typeface="Georgia" pitchFamily="34" charset="-120"/>
+              </a:rPr>
+              <a:t>It's real, not a slide</a:t>
+            </a:r>
+            <a:endParaRPr lang="en-US" sz="1500" dirty="0"/>
+          </a:p>
+        </p:txBody>
+      </p:sp>
+      <p:sp>
+        <p:nvSpPr>
+          <p:cNvPr id="11" name="Text 9"/>
+          <p:cNvSpPr/>
+          <p:nvPr/>
+        </p:nvSpPr>
+        <p:spPr>
+          <a:xfrm>
+            <a:off x="3977640" y="3054096"/>
+            <a:ext cx="4526280" cy="713232"/>
+          </a:xfrm>
+          <a:prstGeom prst="rect">
+            <a:avLst/>
+          </a:prstGeom>
+          <a:noFill/>
+          <a:ln/>
+        </p:spPr>
+        <p:txBody>
+          <a:bodyPr wrap="square" lIns="0" tIns="0" rIns="0" bIns="0" rtlCol="0" anchor="t"/>
+          <a:lstStyle/>
+          <a:p>
+            <a:pPr indent="0" marL="0">
+              <a:lnSpc>
+                <a:spcPct val="105000"/>
+              </a:lnSpc>
+              <a:buNone/>
+            </a:pPr>
+            <a:r>
+              <a:rPr lang="en-US" sz="1250" dirty="0">
+                <a:solidFill>
+                  <a:srgbClr val="7A4F47"/>
+                </a:solidFill>
+                <a:latin typeface="Calibri" pitchFamily="34" charset="0"/>
+                <a:ea typeface="Calibri" pitchFamily="34" charset="-122"/>
+                <a:cs typeface="Calibri" pitchFamily="34" charset="-120"/>
+              </a:rPr>
+              <a:t>A working platform, built and tested on real auction floors — five live channels, settlement running today.</a:t>
+            </a:r>
+            <a:endParaRPr lang="en-US" sz="1250" dirty="0"/>
+          </a:p>
+        </p:txBody>
+      </p:sp>
+      <p:sp>
+        <p:nvSpPr>
+          <p:cNvPr id="12" name="Shape 10"/>
+          <p:cNvSpPr/>
+          <p:nvPr/>
+        </p:nvSpPr>
+        <p:spPr>
+          <a:xfrm>
+            <a:off x="640080" y="3858768"/>
+            <a:ext cx="182880" cy="182880"/>
+          </a:xfrm>
+          <a:prstGeom prst="ellipse">
+            <a:avLst/>
+          </a:prstGeom>
+          <a:solidFill>
+            <a:srgbClr val="B85042"/>
+          </a:solidFill>
+          <a:ln/>
+        </p:spPr>
+      </p:sp>
+      <p:sp>
+        <p:nvSpPr>
+          <p:cNvPr id="13" name="Text 11"/>
+          <p:cNvSpPr/>
+          <p:nvPr/>
+        </p:nvSpPr>
+        <p:spPr>
+          <a:xfrm>
+            <a:off x="960120" y="3822192"/>
+            <a:ext cx="2926080" cy="640080"/>
+          </a:xfrm>
+          <a:prstGeom prst="rect">
+            <a:avLst/>
+          </a:prstGeom>
+          <a:noFill/>
+          <a:ln/>
+        </p:spPr>
+        <p:txBody>
+          <a:bodyPr wrap="square" lIns="0" tIns="0" rIns="0" bIns="0" rtlCol="0" anchor="t"/>
+          <a:lstStyle/>
+          <a:p>
+            <a:pPr indent="0" marL="0">
+              <a:lnSpc>
+                <a:spcPct val="100000"/>
+              </a:lnSpc>
+              <a:buNone/>
+            </a:pPr>
+            <a:r>
+              <a:rPr lang="en-US" sz="1500" b="1" dirty="0">
+                <a:solidFill>
+                  <a:srgbClr val="2D1B1A"/>
+                </a:solidFill>
+                <a:latin typeface="Georgia" pitchFamily="34" charset="0"/>
+                <a:ea typeface="Georgia" pitchFamily="34" charset="-122"/>
+                <a:cs typeface="Georgia" pitchFamily="34" charset="-120"/>
+              </a:rPr>
+              <a:t>You're a founder, not a guinea pig</a:t>
+            </a:r>
+            <a:endParaRPr lang="en-US" sz="1500" dirty="0"/>
+          </a:p>
+        </p:txBody>
+      </p:sp>
+      <p:sp>
+        <p:nvSpPr>
+          <p:cNvPr id="14" name="Text 12"/>
+          <p:cNvSpPr/>
+          <p:nvPr/>
+        </p:nvSpPr>
+        <p:spPr>
+          <a:xfrm>
+            <a:off x="3977640" y="3822192"/>
+            <a:ext cx="4526280" cy="713232"/>
+          </a:xfrm>
+          <a:prstGeom prst="rect">
+            <a:avLst/>
+          </a:prstGeom>
+          <a:noFill/>
+          <a:ln/>
+        </p:spPr>
+        <p:txBody>
+          <a:bodyPr wrap="square" lIns="0" tIns="0" rIns="0" bIns="0" rtlCol="0" anchor="t"/>
+          <a:lstStyle/>
+          <a:p>
+            <a:pPr indent="0" marL="0">
+              <a:lnSpc>
+                <a:spcPct val="105000"/>
+              </a:lnSpc>
+              <a:buNone/>
+            </a:pPr>
+            <a:r>
+              <a:rPr lang="en-US" sz="1250" dirty="0">
+                <a:solidFill>
+                  <a:srgbClr val="7A4F47"/>
+                </a:solidFill>
+                <a:latin typeface="Calibri" pitchFamily="34" charset="0"/>
+                <a:ea typeface="Calibri" pitchFamily="34" charset="-122"/>
+                <a:cs typeface="Calibri" pitchFamily="34" charset="-120"/>
+              </a:rPr>
+              <a:t>I'm building this with a handful of respected houses. Yours is the kind of name the rest of the market follows.</a:t>
+            </a:r>
+            <a:endParaRPr lang="en-US" sz="1250" dirty="0"/>
+          </a:p>
+        </p:txBody>
+      </p:sp>
+      <p:sp>
+        <p:nvSpPr>
+          <p:cNvPr id="15" name="Text 13"/>
+          <p:cNvSpPr/>
+          <p:nvPr/>
+        </p:nvSpPr>
+        <p:spPr>
+          <a:xfrm>
+            <a:off x="457200" y="4846320"/>
+            <a:ext cx="7315200" cy="201168"/>
+          </a:xfrm>
+          <a:prstGeom prst="rect">
+            <a:avLst/>
+          </a:prstGeom>
+          <a:noFill/>
+          <a:ln/>
+        </p:spPr>
+        <p:txBody>
+          <a:bodyPr wrap="square" rtlCol="0" anchor="ctr"/>
+          <a:lstStyle/>
+          <a:p>
+            <a:pPr indent="0" marL="0">
+              <a:buNone/>
+            </a:pPr>
+            <a:r>
+              <a:rPr lang="en-US" sz="800" spc="300" kern="0" dirty="0">
+                <a:solidFill>
+                  <a:srgbClr val="7A4F47"/>
+                </a:solidFill>
+                <a:latin typeface="Calibri" pitchFamily="34" charset="0"/>
+                <a:ea typeface="Calibri" pitchFamily="34" charset="-122"/>
+                <a:cs typeface="Calibri" pitchFamily="34" charset="-120"/>
+              </a:rPr>
+              <a:t>MIMOO  ·  FOR ZIMBABWE'S AUCTION HOUSES</a:t>
+            </a:r>
+            <a:endParaRPr lang="en-US" sz="800" dirty="0"/>
+          </a:p>
+        </p:txBody>
+      </p:sp>
+      <p:sp>
+        <p:nvSpPr>
+          <p:cNvPr id="16" name="Text 14"/>
+          <p:cNvSpPr/>
+          <p:nvPr/>
+        </p:nvSpPr>
+        <p:spPr>
+          <a:xfrm>
+            <a:off x="8229600" y="4846320"/>
+            <a:ext cx="548640" cy="201168"/>
+          </a:xfrm>
+          <a:prstGeom prst="rect">
+            <a:avLst/>
+          </a:prstGeom>
+          <a:noFill/>
+          <a:ln/>
+        </p:spPr>
+        <p:txBody>
+          <a:bodyPr wrap="square" rtlCol="0" anchor="ctr"/>
+          <a:lstStyle/>
+          <a:p>
+            <a:pPr algn="r" indent="0" marL="0">
+              <a:buNone/>
+            </a:pPr>
+            <a:r>
+              <a:rPr lang="en-US" sz="800" dirty="0">
+                <a:solidFill>
+                  <a:srgbClr val="7A4F47"/>
+                </a:solidFill>
+                <a:latin typeface="Calibri" pitchFamily="34" charset="0"/>
+                <a:ea typeface="Calibri" pitchFamily="34" charset="-122"/>
+                <a:cs typeface="Calibri" pitchFamily="34" charset="-120"/>
+              </a:rPr>
+              <a:t>6 / 8</a:t>
+            </a:r>
+            <a:endParaRPr lang="en-US" sz="800" dirty="0"/>
+          </a:p>
+        </p:txBody>
+      </p:sp>
+    </p:spTree>
+  </p:cSld>
+  <p:clrMapOvr>
+    <a:masterClrMapping/>
+  </p:clrMapOvr>
+</p:sld>
+</file>
+
+<file path=ppt/slides/slide7.xml><?xml version="1.0" encoding="utf-8"?>
+<p:sld xmlns:a="http://schemas.openxmlformats.org/drawingml/2006/main" xmlns:r="http://schemas.openxmlformats.org/officeDocument/2006/relationships" xmlns:p="http://schemas.openxmlformats.org/presentationml/2006/main">
+  <p:cSld name="Slide 7">
+    <p:bg>
+      <p:bgPr>
+        <a:solidFill>
+          <a:srgbClr val="F5E6D3"/>
+        </a:solidFill>
+      </p:bgPr>
+    </p:bg>
+    <p:spTree>
+      <p:nvGrpSpPr>
+        <p:cNvPr id="1" name=""/>
+        <p:cNvGrpSpPr/>
+        <p:nvPr/>
+      </p:nvGrpSpPr>
+      <p:grpSpPr>
+        <a:xfrm>
+          <a:off x="0" y="0"/>
+          <a:ext cx="0" cy="0"/>
+          <a:chOff x="0" y="0"/>
+          <a:chExt cx="0" cy="0"/>
+        </a:xfrm>
+      </p:grpSpPr>
+      <p:sp>
+        <p:nvSpPr>
+          <p:cNvPr id="2" name="Shape 0"/>
+          <p:cNvSpPr/>
+          <p:nvPr/>
+        </p:nvSpPr>
+        <p:spPr>
+          <a:xfrm>
+            <a:off x="0" y="0"/>
+            <a:ext cx="164592" cy="5143500"/>
+          </a:xfrm>
+          <a:prstGeom prst="rect">
+            <a:avLst/>
+          </a:prstGeom>
+          <a:solidFill>
+            <a:srgbClr val="D4A843"/>
+          </a:solidFill>
+          <a:ln/>
+        </p:spPr>
+      </p:sp>
+      <p:sp>
+        <p:nvSpPr>
+          <p:cNvPr id="3" name="Text 1"/>
+          <p:cNvSpPr/>
+          <p:nvPr/>
+        </p:nvSpPr>
+        <p:spPr>
+          <a:xfrm>
+            <a:off x="640080" y="475488"/>
+            <a:ext cx="7772400" cy="274320"/>
+          </a:xfrm>
+          <a:prstGeom prst="rect">
+            <a:avLst/>
+          </a:prstGeom>
+          <a:noFill/>
+          <a:ln/>
+        </p:spPr>
+        <p:txBody>
+          <a:bodyPr wrap="square" rtlCol="0" anchor="ctr"/>
+          <a:lstStyle/>
+          <a:p>
+            <a:pPr indent="0" marL="0">
+              <a:buNone/>
+            </a:pPr>
+            <a:r>
+              <a:rPr lang="en-US" sz="1100" b="1" spc="400" kern="0" dirty="0">
+                <a:solidFill>
+                  <a:srgbClr val="B85042"/>
+                </a:solidFill>
+                <a:latin typeface="Calibri" pitchFamily="34" charset="0"/>
+                <a:ea typeface="Calibri" pitchFamily="34" charset="-122"/>
+                <a:cs typeface="Calibri" pitchFamily="34" charset="-120"/>
+              </a:rPr>
+              <a:t>THE OFFER</a:t>
+            </a:r>
+            <a:endParaRPr lang="en-US" sz="1100" dirty="0"/>
+          </a:p>
+        </p:txBody>
+      </p:sp>
+      <p:sp>
+        <p:nvSpPr>
+          <p:cNvPr id="4" name="Text 2"/>
+          <p:cNvSpPr/>
+          <p:nvPr/>
+        </p:nvSpPr>
+        <p:spPr>
+          <a:xfrm>
+            <a:off x="640080" y="868680"/>
+            <a:ext cx="7955280" cy="777240"/>
+          </a:xfrm>
+          <a:prstGeom prst="rect">
+            <a:avLst/>
+          </a:prstGeom>
+          <a:noFill/>
+          <a:ln/>
+        </p:spPr>
+        <p:txBody>
+          <a:bodyPr wrap="square" lIns="0" tIns="0" rIns="0" bIns="0" rtlCol="0" anchor="ctr"/>
+          <a:lstStyle/>
+          <a:p>
+            <a:pPr indent="0" marL="0">
+              <a:lnSpc>
+                <a:spcPct val="102000"/>
+              </a:lnSpc>
+              <a:buNone/>
+            </a:pPr>
+            <a:r>
+              <a:rPr lang="en-US" sz="2600" b="1" dirty="0">
+                <a:solidFill>
+                  <a:srgbClr val="2D1B1A"/>
+                </a:solidFill>
+                <a:latin typeface="Georgia" pitchFamily="34" charset="0"/>
+                <a:ea typeface="Georgia" pitchFamily="34" charset="-122"/>
+                <a:cs typeface="Georgia" pitchFamily="34" charset="-120"/>
+              </a:rPr>
+              <a:t>Run one sale day on it. Keep only what works.</a:t>
+            </a:r>
+            <a:endParaRPr lang="en-US" sz="2600" dirty="0"/>
+          </a:p>
+        </p:txBody>
+      </p:sp>
+      <p:sp>
+        <p:nvSpPr>
+          <p:cNvPr id="5" name="Shape 3"/>
+          <p:cNvSpPr/>
+          <p:nvPr/>
+        </p:nvSpPr>
+        <p:spPr>
+          <a:xfrm>
+            <a:off x="640080" y="1828800"/>
+            <a:ext cx="502920" cy="502920"/>
+          </a:xfrm>
+          <a:prstGeom prst="ellipse">
+            <a:avLst/>
+          </a:prstGeom>
+          <a:solidFill>
+            <a:srgbClr val="B85042"/>
+          </a:solidFill>
+          <a:ln/>
+        </p:spPr>
+      </p:sp>
+      <p:sp>
+        <p:nvSpPr>
+          <p:cNvPr id="6" name="Text 4"/>
+          <p:cNvSpPr/>
+          <p:nvPr/>
+        </p:nvSpPr>
+        <p:spPr>
+          <a:xfrm>
+            <a:off x="640080" y="1828800"/>
+            <a:ext cx="502920" cy="502920"/>
+          </a:xfrm>
+          <a:prstGeom prst="rect">
+            <a:avLst/>
+          </a:prstGeom>
+          <a:noFill/>
+          <a:ln/>
+        </p:spPr>
+        <p:txBody>
+          <a:bodyPr wrap="square" lIns="0" tIns="0" rIns="0" bIns="0" rtlCol="0" anchor="ctr"/>
+          <a:lstStyle/>
+          <a:p>
+            <a:pPr algn="ctr" indent="0" marL="0">
+              <a:buNone/>
+            </a:pPr>
+            <a:r>
+              <a:rPr lang="en-US" sz="2200" b="1" dirty="0">
+                <a:solidFill>
+                  <a:srgbClr val="F5E6D3"/>
+                </a:solidFill>
+                <a:latin typeface="Georgia" pitchFamily="34" charset="0"/>
+                <a:ea typeface="Georgia" pitchFamily="34" charset="-122"/>
+                <a:cs typeface="Georgia" pitchFamily="34" charset="-120"/>
+              </a:rPr>
+              <a:t>1</a:t>
+            </a:r>
+            <a:endParaRPr lang="en-US" sz="2200" dirty="0"/>
+          </a:p>
+        </p:txBody>
+      </p:sp>
+      <p:sp>
+        <p:nvSpPr>
+          <p:cNvPr id="7" name="Text 5"/>
+          <p:cNvSpPr/>
+          <p:nvPr/>
+        </p:nvSpPr>
+        <p:spPr>
+          <a:xfrm>
+            <a:off x="1280160" y="1856232"/>
+            <a:ext cx="1965960" cy="457200"/>
+          </a:xfrm>
+          <a:prstGeom prst="rect">
+            <a:avLst/>
+          </a:prstGeom>
+          <a:noFill/>
+          <a:ln/>
+        </p:spPr>
+        <p:txBody>
+          <a:bodyPr wrap="square" lIns="0" tIns="0" rIns="0" bIns="0" rtlCol="0" anchor="ctr"/>
+          <a:lstStyle/>
+          <a:p>
+            <a:pPr indent="0" marL="0">
+              <a:buNone/>
+            </a:pPr>
+            <a:r>
+              <a:rPr lang="en-US" sz="1800" b="1" dirty="0">
+                <a:solidFill>
+                  <a:srgbClr val="2D1B1A"/>
+                </a:solidFill>
+                <a:latin typeface="Georgia" pitchFamily="34" charset="0"/>
+                <a:ea typeface="Georgia" pitchFamily="34" charset="-122"/>
+                <a:cs typeface="Georgia" pitchFamily="34" charset="-120"/>
+              </a:rPr>
+              <a:t>Set up</a:t>
+            </a:r>
+            <a:endParaRPr lang="en-US" sz="1800" dirty="0"/>
+          </a:p>
+        </p:txBody>
+      </p:sp>
+      <p:sp>
+        <p:nvSpPr>
+          <p:cNvPr id="8" name="Text 6"/>
+          <p:cNvSpPr/>
+          <p:nvPr/>
+        </p:nvSpPr>
+        <p:spPr>
+          <a:xfrm>
+            <a:off x="640080" y="2514600"/>
+            <a:ext cx="2514600" cy="1143000"/>
+          </a:xfrm>
+          <a:prstGeom prst="rect">
+            <a:avLst/>
+          </a:prstGeom>
+          <a:noFill/>
+          <a:ln/>
+        </p:spPr>
+        <p:txBody>
+          <a:bodyPr wrap="square" lIns="0" tIns="0" rIns="0" bIns="0" rtlCol="0" anchor="ctr"/>
+          <a:lstStyle/>
+          <a:p>
+            <a:pPr indent="0" marL="0">
+              <a:lnSpc>
+                <a:spcPct val="108000"/>
+              </a:lnSpc>
+              <a:buNone/>
+            </a:pPr>
+            <a:r>
+              <a:rPr lang="en-US" sz="1250" dirty="0">
+                <a:solidFill>
+                  <a:srgbClr val="7A4F47"/>
+                </a:solidFill>
+                <a:latin typeface="Calibri" pitchFamily="34" charset="0"/>
+                <a:ea typeface="Calibri" pitchFamily="34" charset="-122"/>
+                <a:cs typeface="Calibri" pitchFamily="34" charset="-120"/>
+              </a:rPr>
+              <a:t>Your branded floor, live in a week. No engineering, no disruption to how you run the room.</a:t>
+            </a:r>
+            <a:endParaRPr lang="en-US" sz="1250" dirty="0"/>
+          </a:p>
+        </p:txBody>
+      </p:sp>
+      <p:sp>
+        <p:nvSpPr>
+          <p:cNvPr id="9" name="Shape 7"/>
+          <p:cNvSpPr/>
+          <p:nvPr/>
+        </p:nvSpPr>
+        <p:spPr>
+          <a:xfrm>
+            <a:off x="3383280" y="1828800"/>
+            <a:ext cx="502920" cy="502920"/>
+          </a:xfrm>
+          <a:prstGeom prst="ellipse">
+            <a:avLst/>
+          </a:prstGeom>
+          <a:solidFill>
+            <a:srgbClr val="B85042"/>
+          </a:solidFill>
+          <a:ln/>
+        </p:spPr>
+      </p:sp>
+      <p:sp>
+        <p:nvSpPr>
+          <p:cNvPr id="10" name="Text 8"/>
+          <p:cNvSpPr/>
+          <p:nvPr/>
+        </p:nvSpPr>
+        <p:spPr>
+          <a:xfrm>
+            <a:off x="3383280" y="1828800"/>
+            <a:ext cx="502920" cy="502920"/>
+          </a:xfrm>
+          <a:prstGeom prst="rect">
+            <a:avLst/>
+          </a:prstGeom>
+          <a:noFill/>
+          <a:ln/>
+        </p:spPr>
+        <p:txBody>
+          <a:bodyPr wrap="square" lIns="0" tIns="0" rIns="0" bIns="0" rtlCol="0" anchor="ctr"/>
+          <a:lstStyle/>
+          <a:p>
+            <a:pPr algn="ctr" indent="0" marL="0">
+              <a:buNone/>
+            </a:pPr>
+            <a:r>
+              <a:rPr lang="en-US" sz="2200" b="1" dirty="0">
+                <a:solidFill>
+                  <a:srgbClr val="F5E6D3"/>
+                </a:solidFill>
+                <a:latin typeface="Georgia" pitchFamily="34" charset="0"/>
+                <a:ea typeface="Georgia" pitchFamily="34" charset="-122"/>
+                <a:cs typeface="Georgia" pitchFamily="34" charset="-120"/>
+              </a:rPr>
+              <a:t>2</a:t>
+            </a:r>
+            <a:endParaRPr lang="en-US" sz="2200" dirty="0"/>
+          </a:p>
+        </p:txBody>
+      </p:sp>
+      <p:sp>
+        <p:nvSpPr>
+          <p:cNvPr id="11" name="Text 9"/>
+          <p:cNvSpPr/>
+          <p:nvPr/>
+        </p:nvSpPr>
+        <p:spPr>
+          <a:xfrm>
+            <a:off x="4023360" y="1856232"/>
+            <a:ext cx="1965960" cy="457200"/>
+          </a:xfrm>
+          <a:prstGeom prst="rect">
+            <a:avLst/>
+          </a:prstGeom>
+          <a:noFill/>
+          <a:ln/>
+        </p:spPr>
+        <p:txBody>
+          <a:bodyPr wrap="square" lIns="0" tIns="0" rIns="0" bIns="0" rtlCol="0" anchor="ctr"/>
+          <a:lstStyle/>
+          <a:p>
+            <a:pPr indent="0" marL="0">
+              <a:buNone/>
+            </a:pPr>
+            <a:r>
+              <a:rPr lang="en-US" sz="1800" b="1" dirty="0">
+                <a:solidFill>
+                  <a:srgbClr val="2D1B1A"/>
+                </a:solidFill>
+                <a:latin typeface="Georgia" pitchFamily="34" charset="0"/>
+                <a:ea typeface="Georgia" pitchFamily="34" charset="-122"/>
+                <a:cs typeface="Georgia" pitchFamily="34" charset="-120"/>
+              </a:rPr>
+              <a:t>Run one sale</a:t>
+            </a:r>
+            <a:endParaRPr lang="en-US" sz="1800" dirty="0"/>
+          </a:p>
+        </p:txBody>
+      </p:sp>
+      <p:sp>
+        <p:nvSpPr>
+          <p:cNvPr id="12" name="Text 10"/>
+          <p:cNvSpPr/>
+          <p:nvPr/>
+        </p:nvSpPr>
+        <p:spPr>
+          <a:xfrm>
+            <a:off x="3383280" y="2514600"/>
+            <a:ext cx="2514600" cy="1143000"/>
+          </a:xfrm>
+          <a:prstGeom prst="rect">
+            <a:avLst/>
+          </a:prstGeom>
+          <a:noFill/>
+          <a:ln/>
+        </p:spPr>
+        <p:txBody>
+          <a:bodyPr wrap="square" lIns="0" tIns="0" rIns="0" bIns="0" rtlCol="0" anchor="ctr"/>
+          <a:lstStyle/>
+          <a:p>
+            <a:pPr indent="0" marL="0">
+              <a:lnSpc>
+                <a:spcPct val="108000"/>
+              </a:lnSpc>
+              <a:buNone/>
+            </a:pPr>
+            <a:r>
+              <a:rPr lang="en-US" sz="1250" dirty="0">
+                <a:solidFill>
+                  <a:srgbClr val="7A4F47"/>
+                </a:solidFill>
+                <a:latin typeface="Calibri" pitchFamily="34" charset="0"/>
+                <a:ea typeface="Calibri" pitchFamily="34" charset="-122"/>
+                <a:cs typeface="Calibri" pitchFamily="34" charset="-120"/>
+              </a:rPr>
+              <a:t>We stand beside you for a single sale day and switch the digital bidders on — side by side.</a:t>
+            </a:r>
+            <a:endParaRPr lang="en-US" sz="1250" dirty="0"/>
+          </a:p>
+        </p:txBody>
+      </p:sp>
+      <p:sp>
+        <p:nvSpPr>
+          <p:cNvPr id="13" name="Shape 11"/>
+          <p:cNvSpPr/>
+          <p:nvPr/>
+        </p:nvSpPr>
+        <p:spPr>
+          <a:xfrm>
+            <a:off x="6126480" y="1828800"/>
+            <a:ext cx="502920" cy="502920"/>
+          </a:xfrm>
+          <a:prstGeom prst="ellipse">
+            <a:avLst/>
+          </a:prstGeom>
+          <a:solidFill>
+            <a:srgbClr val="B85042"/>
+          </a:solidFill>
+          <a:ln/>
+        </p:spPr>
+      </p:sp>
+      <p:sp>
+        <p:nvSpPr>
+          <p:cNvPr id="14" name="Text 12"/>
+          <p:cNvSpPr/>
+          <p:nvPr/>
+        </p:nvSpPr>
+        <p:spPr>
+          <a:xfrm>
+            <a:off x="6126480" y="1828800"/>
+            <a:ext cx="502920" cy="502920"/>
+          </a:xfrm>
+          <a:prstGeom prst="rect">
+            <a:avLst/>
+          </a:prstGeom>
+          <a:noFill/>
+          <a:ln/>
+        </p:spPr>
+        <p:txBody>
+          <a:bodyPr wrap="square" lIns="0" tIns="0" rIns="0" bIns="0" rtlCol="0" anchor="ctr"/>
+          <a:lstStyle/>
+          <a:p>
+            <a:pPr algn="ctr" indent="0" marL="0">
+              <a:buNone/>
+            </a:pPr>
+            <a:r>
+              <a:rPr lang="en-US" sz="2200" b="1" dirty="0">
+                <a:solidFill>
+                  <a:srgbClr val="F5E6D3"/>
+                </a:solidFill>
+                <a:latin typeface="Georgia" pitchFamily="34" charset="0"/>
+                <a:ea typeface="Georgia" pitchFamily="34" charset="-122"/>
+                <a:cs typeface="Georgia" pitchFamily="34" charset="-120"/>
+              </a:rPr>
+              <a:t>3</a:t>
+            </a:r>
+            <a:endParaRPr lang="en-US" sz="2200" dirty="0"/>
+          </a:p>
+        </p:txBody>
+      </p:sp>
+      <p:sp>
+        <p:nvSpPr>
+          <p:cNvPr id="15" name="Text 13"/>
+          <p:cNvSpPr/>
+          <p:nvPr/>
+        </p:nvSpPr>
+        <p:spPr>
+          <a:xfrm>
+            <a:off x="6766560" y="1856232"/>
+            <a:ext cx="1965960" cy="457200"/>
+          </a:xfrm>
+          <a:prstGeom prst="rect">
+            <a:avLst/>
+          </a:prstGeom>
+          <a:noFill/>
+          <a:ln/>
+        </p:spPr>
+        <p:txBody>
+          <a:bodyPr wrap="square" lIns="0" tIns="0" rIns="0" bIns="0" rtlCol="0" anchor="ctr"/>
+          <a:lstStyle/>
+          <a:p>
+            <a:pPr indent="0" marL="0">
+              <a:buNone/>
+            </a:pPr>
+            <a:r>
+              <a:rPr lang="en-US" sz="1800" b="1" dirty="0">
+                <a:solidFill>
+                  <a:srgbClr val="2D1B1A"/>
+                </a:solidFill>
+                <a:latin typeface="Georgia" pitchFamily="34" charset="0"/>
+                <a:ea typeface="Georgia" pitchFamily="34" charset="-122"/>
+                <a:cs typeface="Georgia" pitchFamily="34" charset="-120"/>
+              </a:rPr>
+              <a:t>Decide</a:t>
+            </a:r>
+            <a:endParaRPr lang="en-US" sz="1800" dirty="0"/>
+          </a:p>
+        </p:txBody>
+      </p:sp>
+      <p:sp>
+        <p:nvSpPr>
+          <p:cNvPr id="16" name="Text 14"/>
+          <p:cNvSpPr/>
+          <p:nvPr/>
+        </p:nvSpPr>
+        <p:spPr>
+          <a:xfrm>
+            <a:off x="6126480" y="2514600"/>
+            <a:ext cx="2514600" cy="1143000"/>
+          </a:xfrm>
+          <a:prstGeom prst="rect">
+            <a:avLst/>
+          </a:prstGeom>
+          <a:noFill/>
+          <a:ln/>
+        </p:spPr>
+        <p:txBody>
+          <a:bodyPr wrap="square" lIns="0" tIns="0" rIns="0" bIns="0" rtlCol="0" anchor="ctr"/>
+          <a:lstStyle/>
+          <a:p>
+            <a:pPr indent="0" marL="0">
+              <a:lnSpc>
+                <a:spcPct val="108000"/>
+              </a:lnSpc>
+              <a:buNone/>
+            </a:pPr>
+            <a:r>
+              <a:rPr lang="en-US" sz="1250" dirty="0">
+                <a:solidFill>
+                  <a:srgbClr val="7A4F47"/>
+                </a:solidFill>
+                <a:latin typeface="Calibri" pitchFamily="34" charset="0"/>
+                <a:ea typeface="Calibri" pitchFamily="34" charset="-122"/>
+                <a:cs typeface="Calibri" pitchFamily="34" charset="-120"/>
+              </a:rPr>
+              <a:t>You see the bidders you were missing, then choose. Walk away any time — no lock-in.</a:t>
+            </a:r>
+            <a:endParaRPr lang="en-US" sz="1250" dirty="0"/>
+          </a:p>
+        </p:txBody>
+      </p:sp>
+      <p:sp>
+        <p:nvSpPr>
+          <p:cNvPr id="17" name="Shape 15"/>
+          <p:cNvSpPr/>
+          <p:nvPr/>
+        </p:nvSpPr>
+        <p:spPr>
+          <a:xfrm>
+            <a:off x="640080" y="3931920"/>
+            <a:ext cx="7955280" cy="658368"/>
+          </a:xfrm>
+          <a:prstGeom prst="rect">
+            <a:avLst/>
+          </a:prstGeom>
+          <a:solidFill>
+            <a:srgbClr val="2D1B1A"/>
+          </a:solidFill>
+          <a:ln/>
+        </p:spPr>
+      </p:sp>
+      <p:sp>
+        <p:nvSpPr>
+          <p:cNvPr id="18" name="Text 16"/>
+          <p:cNvSpPr/>
+          <p:nvPr/>
+        </p:nvSpPr>
+        <p:spPr>
+          <a:xfrm>
+            <a:off x="868680" y="3931920"/>
+            <a:ext cx="7543800" cy="658368"/>
+          </a:xfrm>
+          <a:prstGeom prst="rect">
+            <a:avLst/>
+          </a:prstGeom>
+          <a:noFill/>
+          <a:ln/>
+        </p:spPr>
+        <p:txBody>
+          <a:bodyPr wrap="square" lIns="0" tIns="0" rIns="0" bIns="0" rtlCol="0" anchor="ctr"/>
+          <a:lstStyle/>
+          <a:p>
+            <a:pPr indent="0" marL="0">
+              <a:buNone/>
+            </a:pPr>
+            <a:r>
+              <a:rPr lang="en-US" sz="1200" b="1" spc="200" kern="0" dirty="0">
+                <a:solidFill>
+                  <a:srgbClr val="D4A843"/>
+                </a:solidFill>
+                <a:latin typeface="Calibri" pitchFamily="34" charset="0"/>
+                <a:ea typeface="Calibri" pitchFamily="34" charset="-122"/>
+                <a:cs typeface="Calibri" pitchFamily="34" charset="-120"/>
+              </a:rPr>
+              <a:t>THE TERMS   </a:t>
+            </a:r>
+            <a:pPr indent="0" marL="0">
+              <a:buNone/>
+            </a:pPr>
+            <a:r>
+              <a:rPr lang="en-US" sz="1200" dirty="0">
+                <a:solidFill>
+                  <a:srgbClr val="F5E6D3"/>
+                </a:solidFill>
+                <a:latin typeface="Calibri" pitchFamily="34" charset="0"/>
+                <a:ea typeface="Calibri" pitchFamily="34" charset="-122"/>
+                <a:cs typeface="Calibri" pitchFamily="34" charset="-120"/>
+              </a:rPr>
+              <a:t>US$1,000 to start, credited on sign-on  ·  90 days  ·  no lock-in  ·  founding houses only</a:t>
+            </a:r>
+            <a:endParaRPr lang="en-US" sz="1200" dirty="0"/>
+          </a:p>
+        </p:txBody>
+      </p:sp>
+      <p:sp>
+        <p:nvSpPr>
+          <p:cNvPr id="19" name="Text 17"/>
+          <p:cNvSpPr/>
+          <p:nvPr/>
+        </p:nvSpPr>
+        <p:spPr>
+          <a:xfrm>
+            <a:off x="457200" y="4846320"/>
+            <a:ext cx="7315200" cy="201168"/>
+          </a:xfrm>
+          <a:prstGeom prst="rect">
+            <a:avLst/>
+          </a:prstGeom>
+          <a:noFill/>
+          <a:ln/>
+        </p:spPr>
+        <p:txBody>
+          <a:bodyPr wrap="square" rtlCol="0" anchor="ctr"/>
+          <a:lstStyle/>
+          <a:p>
+            <a:pPr indent="0" marL="0">
+              <a:buNone/>
+            </a:pPr>
+            <a:r>
+              <a:rPr lang="en-US" sz="800" spc="300" kern="0" dirty="0">
+                <a:solidFill>
+                  <a:srgbClr val="7A4F47"/>
+                </a:solidFill>
+                <a:latin typeface="Calibri" pitchFamily="34" charset="0"/>
+                <a:ea typeface="Calibri" pitchFamily="34" charset="-122"/>
+                <a:cs typeface="Calibri" pitchFamily="34" charset="-120"/>
+              </a:rPr>
+              <a:t>MIMOO  ·  FOR ZIMBABWE'S AUCTION HOUSES</a:t>
+            </a:r>
+            <a:endParaRPr lang="en-US" sz="800" dirty="0"/>
+          </a:p>
+        </p:txBody>
+      </p:sp>
+      <p:sp>
+        <p:nvSpPr>
+          <p:cNvPr id="20" name="Text 18"/>
+          <p:cNvSpPr/>
+          <p:nvPr/>
+        </p:nvSpPr>
+        <p:spPr>
+          <a:xfrm>
+            <a:off x="8229600" y="4846320"/>
+            <a:ext cx="548640" cy="201168"/>
+          </a:xfrm>
+          <a:prstGeom prst="rect">
+            <a:avLst/>
+          </a:prstGeom>
+          <a:noFill/>
+          <a:ln/>
+        </p:spPr>
+        <p:txBody>
+          <a:bodyPr wrap="square" rtlCol="0" anchor="ctr"/>
+          <a:lstStyle/>
+          <a:p>
+            <a:pPr algn="r" indent="0" marL="0">
+              <a:buNone/>
+            </a:pPr>
+            <a:r>
+              <a:rPr lang="en-US" sz="800" dirty="0">
+                <a:solidFill>
+                  <a:srgbClr val="7A4F47"/>
+                </a:solidFill>
+                <a:latin typeface="Calibri" pitchFamily="34" charset="0"/>
+                <a:ea typeface="Calibri" pitchFamily="34" charset="-122"/>
+                <a:cs typeface="Calibri" pitchFamily="34" charset="-120"/>
+              </a:rPr>
+              <a:t>7 / 8</a:t>
+            </a:r>
+            <a:endParaRPr lang="en-US" sz="800" dirty="0"/>
+          </a:p>
+        </p:txBody>
+      </p:sp>
+    </p:spTree>
+  </p:cSld>
+  <p:clrMapOvr>
+    <a:masterClrMapping/>
+  </p:clrMapOvr>
+</p:sld>
+</file>
+
+<file path=ppt/slides/slide8.xml><?xml version="1.0" encoding="utf-8"?>
+<p:sld xmlns:a="http://schemas.openxmlformats.org/drawingml/2006/main" xmlns:r="http://schemas.openxmlformats.org/officeDocument/2006/relationships" xmlns:p="http://schemas.openxmlformats.org/presentationml/2006/main">
+  <p:cSld name="Slide 8">
     <p:bg>
       <p:bgPr>
         <a:solidFill>
@@ -4404,8 +4786,8 @@
         </p:nvSpPr>
         <p:spPr>
           <a:xfrm>
-            <a:off x="640080" y="1143000"/>
-            <a:ext cx="5029200" cy="1828800"/>
+            <a:off x="640080" y="1097280"/>
+            <a:ext cx="5120640" cy="1371600"/>
           </a:xfrm>
           <a:prstGeom prst="rect">
             <a:avLst/>
@@ -4424,7 +4806,7 @@
               <a:buNone/>
             </a:pPr>
             <a:r>
-              <a:rPr lang="en-US" sz="3800" b="1" dirty="0">
+              <a:rPr lang="en-US" sz="3700" b="1" dirty="0">
                 <a:solidFill>
                   <a:srgbClr val="F5E6D3"/>
                 </a:solidFill>
@@ -4432,9 +4814,9 @@
                 <a:ea typeface="Georgia" pitchFamily="34" charset="-122"/>
                 <a:cs typeface="Georgia" pitchFamily="34" charset="-120"/>
               </a:rPr>
-              <a:t>One sale day.</a:t>
-            </a:r>
-            <a:endParaRPr lang="en-US" sz="3800" dirty="0"/>
+              <a:t>Let me show you —</a:t>
+            </a:r>
+            <a:endParaRPr lang="en-US" sz="3700" dirty="0"/>
           </a:p>
           <a:p>
             <a:pPr indent="0" marL="0">
@@ -4444,7 +4826,7 @@
               <a:buNone/>
             </a:pPr>
             <a:r>
-              <a:rPr lang="en-US" sz="3800" b="1" dirty="0">
+              <a:rPr lang="en-US" sz="3700" b="1" dirty="0">
                 <a:solidFill>
                   <a:srgbClr val="F5E6D3"/>
                 </a:solidFill>
@@ -4452,42 +4834,103 @@
                 <a:ea typeface="Georgia" pitchFamily="34" charset="-122"/>
                 <a:cs typeface="Georgia" pitchFamily="34" charset="-120"/>
               </a:rPr>
-              <a:t>Ninety days.</a:t>
-            </a:r>
-            <a:endParaRPr lang="en-US" sz="3800" dirty="0"/>
-          </a:p>
+              <a:t>at your next sale.</a:t>
+            </a:r>
+            <a:endParaRPr lang="en-US" sz="3700" dirty="0"/>
+          </a:p>
+        </p:txBody>
+      </p:sp>
+      <p:sp>
+        <p:nvSpPr>
+          <p:cNvPr id="5" name="Text 3"/>
+          <p:cNvSpPr/>
+          <p:nvPr/>
+        </p:nvSpPr>
+        <p:spPr>
+          <a:xfrm>
+            <a:off x="640080" y="2880360"/>
+            <a:ext cx="4983480" cy="914400"/>
+          </a:xfrm>
+          <a:prstGeom prst="rect">
+            <a:avLst/>
+          </a:prstGeom>
+          <a:noFill/>
+          <a:ln/>
+        </p:spPr>
+        <p:txBody>
+          <a:bodyPr wrap="square" lIns="0" tIns="0" rIns="0" bIns="0" rtlCol="0" anchor="ctr"/>
+          <a:lstStyle/>
           <a:p>
             <a:pPr indent="0" marL="0">
               <a:lnSpc>
-                <a:spcPct val="102000"/>
+                <a:spcPct val="112000"/>
               </a:lnSpc>
               <a:buNone/>
             </a:pPr>
             <a:r>
-              <a:rPr lang="en-US" sz="3800" b="1" dirty="0">
-                <a:solidFill>
-                  <a:srgbClr val="F5E6D3"/>
+              <a:rPr lang="en-US" sz="1450" dirty="0">
+                <a:solidFill>
+                  <a:srgbClr val="EADBC6"/>
+                </a:solidFill>
+                <a:latin typeface="Calibri" pitchFamily="34" charset="0"/>
+                <a:ea typeface="Calibri" pitchFamily="34" charset="-122"/>
+                <a:cs typeface="Calibri" pitchFamily="34" charset="-120"/>
+              </a:rPr>
+              <a:t>Start the founding pilot. Or just let me stand at your next auction and show you the hands going up from three provinces away — no commitment.</a:t>
+            </a:r>
+            <a:endParaRPr lang="en-US" sz="1450" dirty="0"/>
+          </a:p>
+        </p:txBody>
+      </p:sp>
+      <p:sp>
+        <p:nvSpPr>
+          <p:cNvPr id="6" name="Text 4"/>
+          <p:cNvSpPr/>
+          <p:nvPr/>
+        </p:nvSpPr>
+        <p:spPr>
+          <a:xfrm>
+            <a:off x="640080" y="3950208"/>
+            <a:ext cx="5029200" cy="365760"/>
+          </a:xfrm>
+          <a:prstGeom prst="rect">
+            <a:avLst/>
+          </a:prstGeom>
+          <a:noFill/>
+          <a:ln/>
+        </p:spPr>
+        <p:txBody>
+          <a:bodyPr wrap="square" lIns="0" tIns="0" rIns="0" bIns="0" rtlCol="0" anchor="ctr"/>
+          <a:lstStyle/>
+          <a:p>
+            <a:pPr indent="0" marL="0">
+              <a:buNone/>
+            </a:pPr>
+            <a:r>
+              <a:rPr lang="en-US" sz="1600" b="1" i="1" dirty="0">
+                <a:solidFill>
+                  <a:srgbClr val="D4A843"/>
                 </a:solidFill>
                 <a:latin typeface="Georgia" pitchFamily="34" charset="0"/>
                 <a:ea typeface="Georgia" pitchFamily="34" charset="-122"/>
                 <a:cs typeface="Georgia" pitchFamily="34" charset="-120"/>
               </a:rPr>
-              <a:t>No risk.</a:t>
-            </a:r>
-            <a:endParaRPr lang="en-US" sz="3800" dirty="0"/>
-          </a:p>
-        </p:txBody>
-      </p:sp>
-      <p:sp>
-        <p:nvSpPr>
-          <p:cNvPr id="5" name="Text 3"/>
-          <p:cNvSpPr/>
-          <p:nvPr/>
-        </p:nvSpPr>
-        <p:spPr>
-          <a:xfrm>
-            <a:off x="640080" y="3246120"/>
-            <a:ext cx="4937760" cy="822960"/>
+              <a:t>My father would be one of them.</a:t>
+            </a:r>
+            <a:endParaRPr lang="en-US" sz="1600" dirty="0"/>
+          </a:p>
+        </p:txBody>
+      </p:sp>
+      <p:sp>
+        <p:nvSpPr>
+          <p:cNvPr id="7" name="Text 5"/>
+          <p:cNvSpPr/>
+          <p:nvPr/>
+        </p:nvSpPr>
+        <p:spPr>
+          <a:xfrm>
+            <a:off x="640080" y="4572000"/>
+            <a:ext cx="5120640" cy="274320"/>
           </a:xfrm>
           <a:prstGeom prst="rect">
             <a:avLst/>
@@ -4500,13 +4943,10 @@
           <a:lstStyle/>
           <a:p>
             <a:pPr indent="0" marL="0">
-              <a:lnSpc>
-                <a:spcPct val="110000"/>
-              </a:lnSpc>
-              <a:buNone/>
-            </a:pPr>
-            <a:r>
-              <a:rPr lang="en-US" sz="1400" b="1" dirty="0">
+              <a:buNone/>
+            </a:pPr>
+            <a:r>
+              <a:rPr lang="en-US" sz="1250" b="1" dirty="0">
                 <a:solidFill>
                   <a:srgbClr val="F5E6D3"/>
                 </a:solidFill>
@@ -4514,99 +4954,23 @@
                 <a:ea typeface="Calibri" pitchFamily="34" charset="-122"/>
                 <a:cs typeface="Calibri" pitchFamily="34" charset="-120"/>
               </a:rPr>
-              <a:t>Run a single sale with Mimoo. </a:t>
-            </a:r>
-            <a:pPr indent="0" marL="0">
-              <a:lnSpc>
-                <a:spcPct val="110000"/>
-              </a:lnSpc>
-              <a:buNone/>
-            </a:pPr>
-            <a:r>
-              <a:rPr lang="en-US" sz="1400" dirty="0">
-                <a:solidFill>
-                  <a:srgbClr val="EADBC6"/>
+              <a:t>Tatenda Nyemudzo</a:t>
+            </a:r>
+            <a:pPr indent="0" marL="0">
+              <a:buNone/>
+            </a:pPr>
+            <a:r>
+              <a:rPr lang="en-US" sz="1250" dirty="0">
+                <a:solidFill>
+                  <a:srgbClr val="D4A843"/>
                 </a:solidFill>
                 <a:latin typeface="Calibri" pitchFamily="34" charset="0"/>
                 <a:ea typeface="Calibri" pitchFamily="34" charset="-122"/>
                 <a:cs typeface="Calibri" pitchFamily="34" charset="-120"/>
               </a:rPr>
-              <a:t>Let me show you the bidders you're missing — on your own floor, with your own cattle.</a:t>
-            </a:r>
-            <a:endParaRPr lang="en-US" sz="1400" dirty="0"/>
-          </a:p>
-        </p:txBody>
-      </p:sp>
-      <p:sp>
-        <p:nvSpPr>
-          <p:cNvPr id="6" name="Shape 4"/>
-          <p:cNvSpPr/>
-          <p:nvPr/>
-        </p:nvSpPr>
-        <p:spPr>
-          <a:xfrm>
-            <a:off x="640080" y="4224528"/>
-            <a:ext cx="2377440" cy="18288"/>
-          </a:xfrm>
-          <a:prstGeom prst="rect">
-            <a:avLst/>
-          </a:prstGeom>
-          <a:solidFill>
-            <a:srgbClr val="D4A843"/>
-          </a:solidFill>
-          <a:ln/>
-        </p:spPr>
-      </p:sp>
-      <p:sp>
-        <p:nvSpPr>
-          <p:cNvPr id="7" name="Text 5"/>
-          <p:cNvSpPr/>
-          <p:nvPr/>
-        </p:nvSpPr>
-        <p:spPr>
-          <a:xfrm>
-            <a:off x="640080" y="4370832"/>
-            <a:ext cx="5029200" cy="274320"/>
-          </a:xfrm>
-          <a:prstGeom prst="rect">
-            <a:avLst/>
-          </a:prstGeom>
-          <a:noFill/>
-          <a:ln/>
-        </p:spPr>
-        <p:txBody>
-          <a:bodyPr wrap="square" lIns="0" tIns="0" rIns="0" bIns="0" rtlCol="0" anchor="ctr"/>
-          <a:lstStyle/>
-          <a:p>
-            <a:pPr indent="0" marL="0">
-              <a:buNone/>
-            </a:pPr>
-            <a:r>
-              <a:rPr lang="en-US" sz="1300" b="1" dirty="0">
-                <a:solidFill>
-                  <a:srgbClr val="F5E6D3"/>
-                </a:solidFill>
-                <a:latin typeface="Calibri" pitchFamily="34" charset="0"/>
-                <a:ea typeface="Calibri" pitchFamily="34" charset="-122"/>
-                <a:cs typeface="Calibri" pitchFamily="34" charset="-120"/>
-              </a:rPr>
-              <a:t>Tatenda Nyemudzo</a:t>
-            </a:r>
-            <a:pPr indent="0" marL="0">
-              <a:buNone/>
-            </a:pPr>
-            <a:r>
-              <a:rPr lang="en-US" sz="1300" dirty="0">
-                <a:solidFill>
-                  <a:srgbClr val="D4A843"/>
-                </a:solidFill>
-                <a:latin typeface="Calibri" pitchFamily="34" charset="0"/>
-                <a:ea typeface="Calibri" pitchFamily="34" charset="-122"/>
-                <a:cs typeface="Calibri" pitchFamily="34" charset="-120"/>
-              </a:rPr>
               <a:t>    dev@paynow.co.zw</a:t>
             </a:r>
-            <a:endParaRPr lang="en-US" sz="1300" dirty="0"/>
+            <a:endParaRPr lang="en-US" sz="1250" dirty="0"/>
           </a:p>
         </p:txBody>
       </p:sp>
@@ -4640,7 +5004,7 @@
         </p:nvSpPr>
         <p:spPr>
           <a:xfrm>
-            <a:off x="5806440" y="1536192"/>
+            <a:off x="5806440" y="1517904"/>
             <a:ext cx="2788920" cy="274320"/>
           </a:xfrm>
           <a:prstGeom prst="rect">
@@ -4657,7 +5021,7 @@
               <a:buNone/>
             </a:pPr>
             <a:r>
-              <a:rPr lang="en-US" sz="1100" b="1" spc="300" kern="0" dirty="0">
+              <a:rPr lang="en-US" sz="1050" b="1" spc="200" kern="0" dirty="0">
                 <a:solidFill>
                   <a:srgbClr val="D4A843"/>
                 </a:solidFill>
@@ -4665,9 +5029,9 @@
                 <a:ea typeface="Calibri" pitchFamily="34" charset="-122"/>
                 <a:cs typeface="Calibri" pitchFamily="34" charset="-120"/>
               </a:rPr>
-              <a:t>THE PILOT</a:t>
-            </a:r>
-            <a:endParaRPr lang="en-US" sz="1100" dirty="0"/>
+              <a:t>THE FOUNDING PILOT</a:t>
+            </a:r>
+            <a:endParaRPr lang="en-US" sz="1050" dirty="0"/>
           </a:p>
         </p:txBody>
       </p:sp>
@@ -4679,7 +5043,7 @@
         </p:nvSpPr>
         <p:spPr>
           <a:xfrm>
-            <a:off x="5806440" y="1920240"/>
+            <a:off x="5806440" y="1901952"/>
             <a:ext cx="2788920" cy="640080"/>
           </a:xfrm>
           <a:prstGeom prst="rect">
@@ -4718,7 +5082,7 @@
         </p:nvSpPr>
         <p:spPr>
           <a:xfrm>
-            <a:off x="5806440" y="2578608"/>
+            <a:off x="5806440" y="2560320"/>
             <a:ext cx="2788920" cy="274320"/>
           </a:xfrm>
           <a:prstGeom prst="rect">
@@ -4757,7 +5121,7 @@
         </p:nvSpPr>
         <p:spPr>
           <a:xfrm>
-            <a:off x="6858000" y="3035808"/>
+            <a:off x="6858000" y="3017520"/>
             <a:ext cx="685800" cy="18288"/>
           </a:xfrm>
           <a:prstGeom prst="rect">
@@ -4792,12 +5156,12 @@
           <a:p>
             <a:pPr algn="ctr" indent="0" marL="0">
               <a:lnSpc>
-                <a:spcPct val="105000"/>
+                <a:spcPct val="108000"/>
               </a:lnSpc>
               <a:buNone/>
             </a:pPr>
             <a:r>
-              <a:rPr lang="en-US" sz="1100" dirty="0">
+              <a:rPr lang="en-US" sz="1150" dirty="0">
                 <a:solidFill>
                   <a:srgbClr val="EADBC6"/>
                 </a:solidFill>
@@ -4805,48 +5169,9 @@
                 <a:ea typeface="Calibri" pitchFamily="34" charset="-122"/>
                 <a:cs typeface="Calibri" pitchFamily="34" charset="-120"/>
               </a:rPr>
-              <a:t>Credited to your contract the day you sign on — a converting house never pays twice.</a:t>
-            </a:r>
-            <a:endParaRPr lang="en-US" sz="1100" dirty="0"/>
-          </a:p>
-        </p:txBody>
-      </p:sp>
-      <p:sp>
-        <p:nvSpPr>
-          <p:cNvPr id="14" name="Text 12"/>
-          <p:cNvSpPr/>
-          <p:nvPr/>
-        </p:nvSpPr>
-        <p:spPr>
-          <a:xfrm>
-            <a:off x="640080" y="4617720"/>
-            <a:ext cx="7863840" cy="274320"/>
-          </a:xfrm>
-          <a:prstGeom prst="rect">
-            <a:avLst/>
-          </a:prstGeom>
-          <a:noFill/>
-          <a:ln/>
-        </p:spPr>
-        <p:txBody>
-          <a:bodyPr wrap="square" lIns="0" tIns="0" rIns="0" bIns="0" rtlCol="0" anchor="ctr"/>
-          <a:lstStyle/>
-          <a:p>
-            <a:pPr indent="0" marL="0">
-              <a:buNone/>
-            </a:pPr>
-            <a:r>
-              <a:rPr lang="en-US" sz="1000" spc="300" kern="0" dirty="0">
-                <a:solidFill>
-                  <a:srgbClr val="D4A843"/>
-                </a:solidFill>
-                <a:latin typeface="Calibri" pitchFamily="34" charset="0"/>
-                <a:ea typeface="Calibri" pitchFamily="34" charset="-122"/>
-                <a:cs typeface="Calibri" pitchFamily="34" charset="-120"/>
-              </a:rPr>
-              <a:t>MIMOO  ·  LIVESTOCK AUCTIONS, SETTLED ON PAYNOW</a:t>
-            </a:r>
-            <a:endParaRPr lang="en-US" sz="1000" dirty="0"/>
+              <a:t>One sale day. 90 days. No lock-in. Credited when you sign on.</a:t>
+            </a:r>
+            <a:endParaRPr lang="en-US" sz="1150" dirty="0"/>
           </a:p>
         </p:txBody>
       </p:sp>
